--- a/01_オペモデル_Mac3台リモート活用_260628.pptx
+++ b/01_オペモデル_Mac3台リモート活用_260628.pptx
@@ -13,6 +13,7 @@
     <p:sldId id="261" r:id="rId12"/>
     <p:sldId id="262" r:id="rId13"/>
     <p:sldId id="263" r:id="rId14"/>
+    <p:sldId id="264" r:id="rId15"/>
   </p:sldIdLst>
   <p:sldSz cx="12188952" cy="6858000" type="screen4x3"/>
   <p:notesSz cx="6858000" cy="9144000"/>
@@ -3852,7 +3853,7 @@
                 </a:solidFill>
                 <a:latin typeface="Hiragino Sans"/>
               </a:rPr>
-              <a:t>ゆーし専用</a:t>
+              <a:t>ゆーし主＋菊池も可</a:t>
             </a:r>
           </a:p>
         </p:txBody>
@@ -3887,7 +3888,7 @@
                 </a:solidFill>
                 <a:latin typeface="Hiragino Sans"/>
               </a:rPr>
-              <a:t>EC折半・本体DBは触らない</a:t>
+              <a:t>菊池ログイン済の3台目</a:t>
             </a:r>
           </a:p>
         </p:txBody>
@@ -5841,11 +5842,11 @@
             <a:r>
               <a:rPr sz="1150" b="0" i="0">
                 <a:solidFill>
-                  <a:srgbClr val="1A1A1A"/>
-                </a:solidFill>
-                <a:latin typeface="Hiragino Sans"/>
-              </a:rPr>
-              <a:t>● 打席直後に“その場で1行”入力</a:t>
+                  <a:srgbClr val="8C241D"/>
+                </a:solidFill>
+                <a:latin typeface="Hiragino Sans"/>
+              </a:rPr>
+              <a:t>● 基本は旧Macに“入って”使う</a:t>
             </a:r>
           </a:p>
         </p:txBody>
@@ -5884,7 +5885,7 @@
                 </a:solidFill>
                 <a:latin typeface="Hiragino Sans"/>
               </a:rPr>
-              <a:t>● 外出時はスマホ→旧Macに</a:t>
+              <a:t>　（ゆーしと同じ・データは旧Mac側）</a:t>
             </a:r>
           </a:p>
         </p:txBody>
@@ -5919,11 +5920,11 @@
             <a:r>
               <a:rPr sz="1150" b="0" i="0">
                 <a:solidFill>
-                  <a:srgbClr val="6E6E6E"/>
-                </a:solidFill>
-                <a:latin typeface="Hiragino Sans"/>
-              </a:rPr>
-              <a:t>　投げてもOK（PC開かなくていい）</a:t>
+                  <a:srgbClr val="1A1A1A"/>
+                </a:solidFill>
+                <a:latin typeface="Hiragino Sans"/>
+              </a:rPr>
+              <a:t>● 圏外/オフライン時だけローカル起動</a:t>
             </a:r>
           </a:p>
         </p:txBody>
@@ -5958,11 +5959,11 @@
             <a:r>
               <a:rPr sz="1150" b="0" i="0">
                 <a:solidFill>
-                  <a:srgbClr val="1A1A1A"/>
-                </a:solidFill>
-                <a:latin typeface="Hiragino Sans"/>
-              </a:rPr>
-              <a:t>● ハイスペック＝重い処理も可</a:t>
+                  <a:srgbClr val="6E6E6E"/>
+                </a:solidFill>
+                <a:latin typeface="Hiragino Sans"/>
+              </a:rPr>
+              <a:t>　→ 後で「保存して」で同期</a:t>
             </a:r>
           </a:p>
         </p:txBody>
@@ -5997,11 +5998,11 @@
             <a:r>
               <a:rPr sz="1150" b="0" i="0">
                 <a:solidFill>
-                  <a:srgbClr val="6E6E6E"/>
-                </a:solidFill>
-                <a:latin typeface="Hiragino Sans"/>
-              </a:rPr>
-              <a:t>● ※書き手は原則旧Mac。新Macは</a:t>
+                  <a:srgbClr val="1A1A1A"/>
+                </a:solidFill>
+                <a:latin typeface="Hiragino Sans"/>
+              </a:rPr>
+              <a:t>● 打席直後に“その場で1行”投げる</a:t>
             </a:r>
           </a:p>
         </p:txBody>
@@ -6040,7 +6041,7 @@
                 </a:solidFill>
                 <a:latin typeface="Hiragino Sans"/>
               </a:rPr>
-              <a:t>　“読む・投げる・その場メモ”中心</a:t>
+              <a:t>● スマホ1本でも旧Macに入れる</a:t>
             </a:r>
           </a:p>
         </p:txBody>
@@ -6169,7 +6170,7 @@
                 </a:solidFill>
                 <a:latin typeface="Hiragino Sans"/>
               </a:rPr>
-              <a:t>ゆーしMac｜ゆーし専用</a:t>
+              <a:t>ゆーしMac｜ゆーし主＋菊池も使える</a:t>
             </a:r>
           </a:p>
         </p:txBody>
@@ -6208,7 +6209,7 @@
                 </a:solidFill>
                 <a:latin typeface="Hiragino Sans"/>
               </a:rPr>
-              <a:t>● EC折半パートナー ゆーし用</a:t>
+              <a:t>● 菊池のGoogle/Claudeログイン済</a:t>
             </a:r>
           </a:p>
         </p:txBody>
@@ -6243,11 +6244,11 @@
             <a:r>
               <a:rPr sz="1150" b="0" i="0">
                 <a:solidFill>
-                  <a:srgbClr val="1A1A1A"/>
-                </a:solidFill>
-                <a:latin typeface="Hiragino Sans"/>
-              </a:rPr>
-              <a:t>● ECや限定作業のみ</a:t>
+                  <a:srgbClr val="6E6E6E"/>
+                </a:solidFill>
+                <a:latin typeface="Hiragino Sans"/>
+              </a:rPr>
+              <a:t>　＋workspace clone済</a:t>
             </a:r>
           </a:p>
         </p:txBody>
@@ -6286,7 +6287,7 @@
                 </a:solidFill>
                 <a:latin typeface="Hiragino Sans"/>
               </a:rPr>
-              <a:t>● KHD本体DB・顧客マスターは</a:t>
+              <a:t>● ＝菊池がすぐ使える3台目の実機</a:t>
             </a:r>
           </a:p>
         </p:txBody>
@@ -6321,11 +6322,11 @@
             <a:r>
               <a:rPr sz="1150" b="0" i="0">
                 <a:solidFill>
-                  <a:srgbClr val="6E6E6E"/>
-                </a:solidFill>
-                <a:latin typeface="Hiragino Sans"/>
-              </a:rPr>
-              <a:t>　触らない（1案件1台を厳守）</a:t>
+                  <a:srgbClr val="1A1A1A"/>
+                </a:solidFill>
+                <a:latin typeface="Hiragino Sans"/>
+              </a:rPr>
+              <a:t>● 普段の主＝ゆーし（EC折半）</a:t>
             </a:r>
           </a:p>
         </p:txBody>
@@ -6360,11 +6361,11 @@
             <a:r>
               <a:rPr sz="1150" b="0" i="0">
                 <a:solidFill>
-                  <a:srgbClr val="6E6E6E"/>
-                </a:solidFill>
-                <a:latin typeface="Hiragino Sans"/>
-              </a:rPr>
-              <a:t>● clone前にKHD_git_remoteを</a:t>
+                  <a:srgbClr val="1A1A1A"/>
+                </a:solidFill>
+                <a:latin typeface="Hiragino Sans"/>
+              </a:rPr>
+              <a:t>● 制約は全台共通：開始pull/終了</a:t>
             </a:r>
           </a:p>
         </p:txBody>
@@ -6403,7 +6404,7 @@
                 </a:solidFill>
                 <a:latin typeface="Hiragino Sans"/>
               </a:rPr>
-              <a:t>　“オフラインで使用可能”に</a:t>
+              <a:t>　push・書き手1台</a:t>
             </a:r>
           </a:p>
         </p:txBody>
@@ -6442,7 +6443,46 @@
                 </a:solidFill>
                 <a:latin typeface="Hiragino Sans"/>
               </a:rPr>
-              <a:t>● 本体と同時pushしない</a:t>
+              <a:t>● “触らない”でなく“同じ案件を</a:t>
+            </a:r>
+          </a:p>
+        </p:txBody>
+      </p:sp>
+      <p:sp>
+        <p:nvSpPr>
+          <p:cNvPr id="38" name="TextBox 37"/>
+          <p:cNvSpPr txBox="1"/>
+          <p:nvPr/>
+        </p:nvSpPr>
+        <p:spPr>
+          <a:xfrm>
+            <a:off x="8330184" y="5769864"/>
+            <a:ext cx="3145536" cy="457200"/>
+          </a:xfrm>
+          <a:prstGeom prst="rect">
+            <a:avLst/>
+          </a:prstGeom>
+          <a:noFill/>
+        </p:spPr>
+        <p:txBody>
+          <a:bodyPr wrap="square" anchor="t">
+            <a:spAutoFit/>
+          </a:bodyPr>
+          <a:lstStyle/>
+          <a:p>
+            <a:pPr algn="l">
+              <a:lnSpc>
+                <a:spcPct val="108000"/>
+              </a:lnSpc>
+            </a:pPr>
+            <a:r>
+              <a:rPr sz="1150" b="0" i="0">
+                <a:solidFill>
+                  <a:srgbClr val="6E6E6E"/>
+                </a:solidFill>
+                <a:latin typeface="Hiragino Sans"/>
+              </a:rPr>
+              <a:t>　母艦と同時に書かない”</a:t>
             </a:r>
           </a:p>
         </p:txBody>
@@ -9426,7 +9466,7 @@
                 </a:solidFill>
                 <a:latin typeface="Hiragino Sans"/>
               </a:rPr>
-              <a:t>COMPARISON</a:t>
+              <a:t>CONNECTION &amp; LOAD</a:t>
             </a:r>
           </a:p>
         </p:txBody>
@@ -9505,7 +9545,7 @@
                 </a:solidFill>
                 <a:latin typeface="Hiragino Sans"/>
               </a:rPr>
-              <a:t>3つの方式 ── 迷ったら本命1本でいい</a:t>
+              <a:t>接続モデルと、メモリ・負荷</a:t>
             </a:r>
           </a:p>
         </p:txBody>
@@ -9540,7 +9580,7 @@
                 </a:solidFill>
                 <a:latin typeface="Hiragino Sans"/>
               </a:rPr>
-              <a:t>結論：菊池さんは Remote Control 一択。他は知識として</a:t>
+              <a:t>入る側（クライアント）は軽い。重さは“入られる側”＝旧Macに集中する</a:t>
             </a:r>
           </a:p>
         </p:txBody>
@@ -9553,8 +9593,166 @@
         </p:nvSpPr>
         <p:spPr>
           <a:xfrm>
-            <a:off x="502920" y="1828800"/>
-            <a:ext cx="3749039" cy="566928"/>
+            <a:off x="502920" y="1737360"/>
+            <a:ext cx="11183112" cy="868680"/>
+          </a:xfrm>
+          <a:prstGeom prst="rect">
+            <a:avLst/>
+          </a:prstGeom>
+          <a:solidFill>
+            <a:srgbClr val="F4E4E2"/>
+          </a:solidFill>
+          <a:ln>
+            <a:noFill/>
+          </a:ln>
+          <a:effectLst/>
+        </p:spPr>
+        <p:style>
+          <a:lnRef idx="1">
+            <a:schemeClr val="accent1"/>
+          </a:lnRef>
+          <a:fillRef idx="3">
+            <a:schemeClr val="accent1"/>
+          </a:fillRef>
+          <a:effectRef idx="2">
+            <a:schemeClr val="accent1"/>
+          </a:effectRef>
+          <a:fontRef idx="minor">
+            <a:schemeClr val="lt1"/>
+          </a:fontRef>
+        </p:style>
+        <p:txBody>
+          <a:bodyPr rtlCol="0" anchor="ctr"/>
+          <a:lstStyle/>
+          <a:p>
+            <a:pPr algn="ctr"/>
+          </a:p>
+        </p:txBody>
+      </p:sp>
+      <p:sp>
+        <p:nvSpPr>
+          <p:cNvPr id="9" name="Rectangle 8"/>
+          <p:cNvSpPr/>
+          <p:nvPr/>
+        </p:nvSpPr>
+        <p:spPr>
+          <a:xfrm>
+            <a:off x="502920" y="1737360"/>
+            <a:ext cx="91440" cy="868680"/>
+          </a:xfrm>
+          <a:prstGeom prst="rect">
+            <a:avLst/>
+          </a:prstGeom>
+          <a:solidFill>
+            <a:srgbClr val="AA2E26"/>
+          </a:solidFill>
+          <a:ln>
+            <a:noFill/>
+          </a:ln>
+          <a:effectLst/>
+        </p:spPr>
+        <p:style>
+          <a:lnRef idx="1">
+            <a:schemeClr val="accent1"/>
+          </a:lnRef>
+          <a:fillRef idx="3">
+            <a:schemeClr val="accent1"/>
+          </a:fillRef>
+          <a:effectRef idx="2">
+            <a:schemeClr val="accent1"/>
+          </a:effectRef>
+          <a:fontRef idx="minor">
+            <a:schemeClr val="lt1"/>
+          </a:fontRef>
+        </p:style>
+        <p:txBody>
+          <a:bodyPr rtlCol="0" anchor="ctr"/>
+          <a:lstStyle/>
+          <a:p>
+            <a:pPr algn="ctr"/>
+          </a:p>
+        </p:txBody>
+      </p:sp>
+      <p:sp>
+        <p:nvSpPr>
+          <p:cNvPr id="10" name="TextBox 9"/>
+          <p:cNvSpPr txBox="1"/>
+          <p:nvPr/>
+        </p:nvSpPr>
+        <p:spPr>
+          <a:xfrm>
+            <a:off x="777240" y="1828800"/>
+            <a:ext cx="10607040" cy="365760"/>
+          </a:xfrm>
+          <a:prstGeom prst="rect">
+            <a:avLst/>
+          </a:prstGeom>
+          <a:noFill/>
+        </p:spPr>
+        <p:txBody>
+          <a:bodyPr wrap="square" anchor="t">
+            <a:spAutoFit/>
+          </a:bodyPr>
+          <a:lstStyle/>
+          <a:p>
+            <a:pPr algn="l"/>
+            <a:r>
+              <a:rPr sz="1400" b="1" i="0">
+                <a:solidFill>
+                  <a:srgbClr val="8C241D"/>
+                </a:solidFill>
+                <a:latin typeface="Hiragino Sans"/>
+              </a:rPr>
+              <a:t>新Mac・ゆーしMac・スマホは、全部「旧Mac」に入る（リモート）</a:t>
+            </a:r>
+          </a:p>
+        </p:txBody>
+      </p:sp>
+      <p:sp>
+        <p:nvSpPr>
+          <p:cNvPr id="11" name="TextBox 10"/>
+          <p:cNvSpPr txBox="1"/>
+          <p:nvPr/>
+        </p:nvSpPr>
+        <p:spPr>
+          <a:xfrm>
+            <a:off x="777240" y="2231136"/>
+            <a:ext cx="10607040" cy="320040"/>
+          </a:xfrm>
+          <a:prstGeom prst="rect">
+            <a:avLst/>
+          </a:prstGeom>
+          <a:noFill/>
+        </p:spPr>
+        <p:txBody>
+          <a:bodyPr wrap="square" anchor="t">
+            <a:spAutoFit/>
+          </a:bodyPr>
+          <a:lstStyle/>
+          <a:p>
+            <a:pPr algn="l"/>
+            <a:r>
+              <a:rPr sz="1150" b="0" i="0">
+                <a:solidFill>
+                  <a:srgbClr val="1A1A1A"/>
+                </a:solidFill>
+                <a:latin typeface="Hiragino Sans"/>
+              </a:rPr>
+              <a:t>本体・データ・記憶は旧Macに1つだけ。だから書き手も実質1台＝同時編集の衝突が起きない。</a:t>
+            </a:r>
+          </a:p>
+        </p:txBody>
+      </p:sp>
+      <p:sp>
+        <p:nvSpPr>
+          <p:cNvPr id="12" name="Rectangle 11"/>
+          <p:cNvSpPr/>
+          <p:nvPr/>
+        </p:nvSpPr>
+        <p:spPr>
+          <a:xfrm>
+            <a:off x="502920" y="2743200"/>
+            <a:ext cx="2926080" cy="512064"/>
           </a:xfrm>
           <a:prstGeom prst="rect">
             <a:avLst/>
@@ -9593,14 +9791,14 @@
       </p:sp>
       <p:sp>
         <p:nvSpPr>
-          <p:cNvPr id="9" name="TextBox 8"/>
-          <p:cNvSpPr txBox="1"/>
-          <p:nvPr/>
-        </p:nvSpPr>
-        <p:spPr>
-          <a:xfrm>
-            <a:off x="667512" y="1828800"/>
-            <a:ext cx="3474719" cy="566928"/>
+          <p:cNvPr id="13" name="TextBox 12"/>
+          <p:cNvSpPr txBox="1"/>
+          <p:nvPr/>
+        </p:nvSpPr>
+        <p:spPr>
+          <a:xfrm>
+            <a:off x="649224" y="2743200"/>
+            <a:ext cx="2670048" cy="512064"/>
           </a:xfrm>
           <a:prstGeom prst="rect">
             <a:avLst/>
@@ -9613,29 +9811,33 @@
           </a:bodyPr>
           <a:lstStyle/>
           <a:p>
-            <a:pPr algn="l"/>
-            <a:r>
-              <a:rPr sz="1200" b="1" i="0">
+            <a:pPr algn="l">
+              <a:lnSpc>
+                <a:spcPct val="100000"/>
+              </a:lnSpc>
+            </a:pPr>
+            <a:r>
+              <a:rPr sz="1150" b="1" i="0">
                 <a:solidFill>
                   <a:srgbClr val="FFFFFF"/>
                 </a:solidFill>
                 <a:latin typeface="Hiragino Sans"/>
               </a:rPr>
-              <a:t>方式</a:t>
-            </a:r>
-          </a:p>
-        </p:txBody>
-      </p:sp>
-      <p:sp>
-        <p:nvSpPr>
-          <p:cNvPr id="10" name="Rectangle 9"/>
+              <a:t>機器</a:t>
+            </a:r>
+          </a:p>
+        </p:txBody>
+      </p:sp>
+      <p:sp>
+        <p:nvSpPr>
+          <p:cNvPr id="14" name="Rectangle 13"/>
           <p:cNvSpPr/>
           <p:nvPr/>
         </p:nvSpPr>
         <p:spPr>
           <a:xfrm>
-            <a:off x="4251959" y="1828800"/>
-            <a:ext cx="2194560" cy="566928"/>
+            <a:off x="3429000" y="2743200"/>
+            <a:ext cx="4206240" cy="512064"/>
           </a:xfrm>
           <a:prstGeom prst="rect">
             <a:avLst/>
@@ -9674,14 +9876,14 @@
       </p:sp>
       <p:sp>
         <p:nvSpPr>
-          <p:cNvPr id="11" name="TextBox 10"/>
-          <p:cNvSpPr txBox="1"/>
-          <p:nvPr/>
-        </p:nvSpPr>
-        <p:spPr>
-          <a:xfrm>
-            <a:off x="4416551" y="1828800"/>
-            <a:ext cx="1920240" cy="566928"/>
+          <p:cNvPr id="15" name="TextBox 14"/>
+          <p:cNvSpPr txBox="1"/>
+          <p:nvPr/>
+        </p:nvSpPr>
+        <p:spPr>
+          <a:xfrm>
+            <a:off x="3575304" y="2743200"/>
+            <a:ext cx="3950208" cy="512064"/>
           </a:xfrm>
           <a:prstGeom prst="rect">
             <a:avLst/>
@@ -9694,29 +9896,33 @@
           </a:bodyPr>
           <a:lstStyle/>
           <a:p>
-            <a:pPr algn="l"/>
-            <a:r>
-              <a:rPr sz="1200" b="1" i="0">
+            <a:pPr algn="l">
+              <a:lnSpc>
+                <a:spcPct val="100000"/>
+              </a:lnSpc>
+            </a:pPr>
+            <a:r>
+              <a:rPr sz="1150" b="1" i="0">
                 <a:solidFill>
                   <a:srgbClr val="FFFFFF"/>
                 </a:solidFill>
                 <a:latin typeface="Hiragino Sans"/>
               </a:rPr>
-              <a:t>セットアップ</a:t>
-            </a:r>
-          </a:p>
-        </p:txBody>
-      </p:sp>
-      <p:sp>
-        <p:nvSpPr>
-          <p:cNvPr id="12" name="Rectangle 11"/>
+              <a:t>役割</a:t>
+            </a:r>
+          </a:p>
+        </p:txBody>
+      </p:sp>
+      <p:sp>
+        <p:nvSpPr>
+          <p:cNvPr id="16" name="Rectangle 15"/>
           <p:cNvSpPr/>
           <p:nvPr/>
         </p:nvSpPr>
         <p:spPr>
           <a:xfrm>
-            <a:off x="6446519" y="1828800"/>
-            <a:ext cx="3657600" cy="566928"/>
+            <a:off x="7635240" y="2743200"/>
+            <a:ext cx="4050791" cy="512064"/>
           </a:xfrm>
           <a:prstGeom prst="rect">
             <a:avLst/>
@@ -9755,14 +9961,14 @@
       </p:sp>
       <p:sp>
         <p:nvSpPr>
-          <p:cNvPr id="13" name="TextBox 12"/>
-          <p:cNvSpPr txBox="1"/>
-          <p:nvPr/>
-        </p:nvSpPr>
-        <p:spPr>
-          <a:xfrm>
-            <a:off x="6611111" y="1828800"/>
-            <a:ext cx="3383280" cy="566928"/>
+          <p:cNvPr id="17" name="TextBox 16"/>
+          <p:cNvSpPr txBox="1"/>
+          <p:nvPr/>
+        </p:nvSpPr>
+        <p:spPr>
+          <a:xfrm>
+            <a:off x="7781544" y="2743200"/>
+            <a:ext cx="3794759" cy="512064"/>
           </a:xfrm>
           <a:prstGeom prst="rect">
             <a:avLst/>
@@ -9775,35 +9981,39 @@
           </a:bodyPr>
           <a:lstStyle/>
           <a:p>
-            <a:pPr algn="l"/>
-            <a:r>
-              <a:rPr sz="1200" b="1" i="0">
+            <a:pPr algn="l">
+              <a:lnSpc>
+                <a:spcPct val="100000"/>
+              </a:lnSpc>
+            </a:pPr>
+            <a:r>
+              <a:rPr sz="1150" b="1" i="0">
                 <a:solidFill>
                   <a:srgbClr val="FFFFFF"/>
                 </a:solidFill>
                 <a:latin typeface="Hiragino Sans"/>
               </a:rPr>
-              <a:t>操作感／用途</a:t>
-            </a:r>
-          </a:p>
-        </p:txBody>
-      </p:sp>
-      <p:sp>
-        <p:nvSpPr>
-          <p:cNvPr id="14" name="Rectangle 13"/>
+              <a:t>メモリ・負荷の目安</a:t>
+            </a:r>
+          </a:p>
+        </p:txBody>
+      </p:sp>
+      <p:sp>
+        <p:nvSpPr>
+          <p:cNvPr id="18" name="Rectangle 17"/>
           <p:cNvSpPr/>
           <p:nvPr/>
         </p:nvSpPr>
         <p:spPr>
           <a:xfrm>
-            <a:off x="10104119" y="1828800"/>
-            <a:ext cx="1581912" cy="566928"/>
+            <a:off x="502920" y="3255264"/>
+            <a:ext cx="2926080" cy="512064"/>
           </a:xfrm>
           <a:prstGeom prst="rect">
             <a:avLst/>
           </a:prstGeom>
           <a:solidFill>
-            <a:srgbClr val="AA2E26"/>
+            <a:srgbClr val="F4E4E2"/>
           </a:solidFill>
           <a:ln w="10160">
             <a:solidFill>
@@ -9836,14 +10046,14 @@
       </p:sp>
       <p:sp>
         <p:nvSpPr>
-          <p:cNvPr id="15" name="TextBox 14"/>
-          <p:cNvSpPr txBox="1"/>
-          <p:nvPr/>
-        </p:nvSpPr>
-        <p:spPr>
-          <a:xfrm>
-            <a:off x="10268711" y="1828800"/>
-            <a:ext cx="1307592" cy="566928"/>
+          <p:cNvPr id="19" name="TextBox 18"/>
+          <p:cNvSpPr txBox="1"/>
+          <p:nvPr/>
+        </p:nvSpPr>
+        <p:spPr>
+          <a:xfrm>
+            <a:off x="649224" y="3255264"/>
+            <a:ext cx="2670048" cy="512064"/>
           </a:xfrm>
           <a:prstGeom prst="rect">
             <a:avLst/>
@@ -9856,29 +10066,458 @@
           </a:bodyPr>
           <a:lstStyle/>
           <a:p>
+            <a:pPr algn="l">
+              <a:lnSpc>
+                <a:spcPct val="100000"/>
+              </a:lnSpc>
+            </a:pPr>
+            <a:r>
+              <a:rPr sz="1100" b="1" i="0">
+                <a:solidFill>
+                  <a:srgbClr val="8C241D"/>
+                </a:solidFill>
+                <a:latin typeface="Hiragino Sans"/>
+              </a:rPr>
+              <a:t>旧Mac（8GB・M1 Air）</a:t>
+            </a:r>
+          </a:p>
+        </p:txBody>
+      </p:sp>
+      <p:sp>
+        <p:nvSpPr>
+          <p:cNvPr id="20" name="Rectangle 19"/>
+          <p:cNvSpPr/>
+          <p:nvPr/>
+        </p:nvSpPr>
+        <p:spPr>
+          <a:xfrm>
+            <a:off x="3429000" y="3255264"/>
+            <a:ext cx="4206240" cy="512064"/>
+          </a:xfrm>
+          <a:prstGeom prst="rect">
+            <a:avLst/>
+          </a:prstGeom>
+          <a:solidFill>
+            <a:srgbClr val="F4E4E2"/>
+          </a:solidFill>
+          <a:ln w="10160">
+            <a:solidFill>
+              <a:srgbClr val="E1DACB"/>
+            </a:solidFill>
+          </a:ln>
+          <a:effectLst/>
+        </p:spPr>
+        <p:style>
+          <a:lnRef idx="1">
+            <a:schemeClr val="accent1"/>
+          </a:lnRef>
+          <a:fillRef idx="3">
+            <a:schemeClr val="accent1"/>
+          </a:fillRef>
+          <a:effectRef idx="2">
+            <a:schemeClr val="accent1"/>
+          </a:effectRef>
+          <a:fontRef idx="minor">
+            <a:schemeClr val="lt1"/>
+          </a:fontRef>
+        </p:style>
+        <p:txBody>
+          <a:bodyPr rtlCol="0" anchor="ctr"/>
+          <a:lstStyle/>
+          <a:p>
             <a:pPr algn="ctr"/>
-            <a:r>
-              <a:rPr sz="1200" b="1" i="0">
-                <a:solidFill>
-                  <a:srgbClr val="FFFFFF"/>
-                </a:solidFill>
-                <a:latin typeface="Hiragino Sans"/>
-              </a:rPr>
-              <a:t>推奨</a:t>
-            </a:r>
-          </a:p>
-        </p:txBody>
-      </p:sp>
-      <p:sp>
-        <p:nvSpPr>
-          <p:cNvPr id="16" name="Rectangle 15"/>
+          </a:p>
+        </p:txBody>
+      </p:sp>
+      <p:sp>
+        <p:nvSpPr>
+          <p:cNvPr id="21" name="TextBox 20"/>
+          <p:cNvSpPr txBox="1"/>
+          <p:nvPr/>
+        </p:nvSpPr>
+        <p:spPr>
+          <a:xfrm>
+            <a:off x="3575304" y="3255264"/>
+            <a:ext cx="3950208" cy="512064"/>
+          </a:xfrm>
+          <a:prstGeom prst="rect">
+            <a:avLst/>
+          </a:prstGeom>
+          <a:noFill/>
+        </p:spPr>
+        <p:txBody>
+          <a:bodyPr wrap="square" anchor="ctr">
+            <a:spAutoFit/>
+          </a:bodyPr>
+          <a:lstStyle/>
+          <a:p>
+            <a:pPr algn="l">
+              <a:lnSpc>
+                <a:spcPct val="100000"/>
+              </a:lnSpc>
+            </a:pPr>
+            <a:r>
+              <a:rPr sz="1100" b="0" i="0">
+                <a:solidFill>
+                  <a:srgbClr val="1A1A1A"/>
+                </a:solidFill>
+                <a:latin typeface="Hiragino Sans"/>
+              </a:rPr>
+              <a:t>母艦＝全員が入る側</a:t>
+            </a:r>
+          </a:p>
+        </p:txBody>
+      </p:sp>
+      <p:sp>
+        <p:nvSpPr>
+          <p:cNvPr id="22" name="Rectangle 21"/>
           <p:cNvSpPr/>
           <p:nvPr/>
         </p:nvSpPr>
         <p:spPr>
           <a:xfrm>
-            <a:off x="502920" y="2395728"/>
-            <a:ext cx="3749039" cy="566928"/>
+            <a:off x="7635240" y="3255264"/>
+            <a:ext cx="4050791" cy="512064"/>
+          </a:xfrm>
+          <a:prstGeom prst="rect">
+            <a:avLst/>
+          </a:prstGeom>
+          <a:solidFill>
+            <a:srgbClr val="F4E4E2"/>
+          </a:solidFill>
+          <a:ln w="10160">
+            <a:solidFill>
+              <a:srgbClr val="E1DACB"/>
+            </a:solidFill>
+          </a:ln>
+          <a:effectLst/>
+        </p:spPr>
+        <p:style>
+          <a:lnRef idx="1">
+            <a:schemeClr val="accent1"/>
+          </a:lnRef>
+          <a:fillRef idx="3">
+            <a:schemeClr val="accent1"/>
+          </a:fillRef>
+          <a:effectRef idx="2">
+            <a:schemeClr val="accent1"/>
+          </a:effectRef>
+          <a:fontRef idx="minor">
+            <a:schemeClr val="lt1"/>
+          </a:fontRef>
+        </p:style>
+        <p:txBody>
+          <a:bodyPr rtlCol="0" anchor="ctr"/>
+          <a:lstStyle/>
+          <a:p>
+            <a:pPr algn="ctr"/>
+          </a:p>
+        </p:txBody>
+      </p:sp>
+      <p:sp>
+        <p:nvSpPr>
+          <p:cNvPr id="23" name="TextBox 22"/>
+          <p:cNvSpPr txBox="1"/>
+          <p:nvPr/>
+        </p:nvSpPr>
+        <p:spPr>
+          <a:xfrm>
+            <a:off x="7781544" y="3255264"/>
+            <a:ext cx="3794759" cy="512064"/>
+          </a:xfrm>
+          <a:prstGeom prst="rect">
+            <a:avLst/>
+          </a:prstGeom>
+          <a:noFill/>
+        </p:spPr>
+        <p:txBody>
+          <a:bodyPr wrap="square" anchor="ctr">
+            <a:spAutoFit/>
+          </a:bodyPr>
+          <a:lstStyle/>
+          <a:p>
+            <a:pPr algn="l">
+              <a:lnSpc>
+                <a:spcPct val="100000"/>
+              </a:lnSpc>
+            </a:pPr>
+            <a:r>
+              <a:rPr sz="1100" b="0" i="0">
+                <a:solidFill>
+                  <a:srgbClr val="1A1A1A"/>
+                </a:solidFill>
+                <a:latin typeface="Hiragino Sans"/>
+              </a:rPr>
+              <a:t>★重い側。全セッション＋リモート配信をここで背負う</a:t>
+            </a:r>
+          </a:p>
+        </p:txBody>
+      </p:sp>
+      <p:sp>
+        <p:nvSpPr>
+          <p:cNvPr id="24" name="Rectangle 23"/>
+          <p:cNvSpPr/>
+          <p:nvPr/>
+        </p:nvSpPr>
+        <p:spPr>
+          <a:xfrm>
+            <a:off x="502920" y="3767328"/>
+            <a:ext cx="2926080" cy="512064"/>
+          </a:xfrm>
+          <a:prstGeom prst="rect">
+            <a:avLst/>
+          </a:prstGeom>
+          <a:solidFill>
+            <a:srgbClr val="ECE8DF"/>
+          </a:solidFill>
+          <a:ln w="10160">
+            <a:solidFill>
+              <a:srgbClr val="E1DACB"/>
+            </a:solidFill>
+          </a:ln>
+          <a:effectLst/>
+        </p:spPr>
+        <p:style>
+          <a:lnRef idx="1">
+            <a:schemeClr val="accent1"/>
+          </a:lnRef>
+          <a:fillRef idx="3">
+            <a:schemeClr val="accent1"/>
+          </a:fillRef>
+          <a:effectRef idx="2">
+            <a:schemeClr val="accent1"/>
+          </a:effectRef>
+          <a:fontRef idx="minor">
+            <a:schemeClr val="lt1"/>
+          </a:fontRef>
+        </p:style>
+        <p:txBody>
+          <a:bodyPr rtlCol="0" anchor="ctr"/>
+          <a:lstStyle/>
+          <a:p>
+            <a:pPr algn="ctr"/>
+          </a:p>
+        </p:txBody>
+      </p:sp>
+      <p:sp>
+        <p:nvSpPr>
+          <p:cNvPr id="25" name="TextBox 24"/>
+          <p:cNvSpPr txBox="1"/>
+          <p:nvPr/>
+        </p:nvSpPr>
+        <p:spPr>
+          <a:xfrm>
+            <a:off x="649224" y="3767328"/>
+            <a:ext cx="2670048" cy="512064"/>
+          </a:xfrm>
+          <a:prstGeom prst="rect">
+            <a:avLst/>
+          </a:prstGeom>
+          <a:noFill/>
+        </p:spPr>
+        <p:txBody>
+          <a:bodyPr wrap="square" anchor="ctr">
+            <a:spAutoFit/>
+          </a:bodyPr>
+          <a:lstStyle/>
+          <a:p>
+            <a:pPr algn="l">
+              <a:lnSpc>
+                <a:spcPct val="100000"/>
+              </a:lnSpc>
+            </a:pPr>
+            <a:r>
+              <a:rPr sz="1100" b="1" i="0">
+                <a:solidFill>
+                  <a:srgbClr val="1A1A1A"/>
+                </a:solidFill>
+                <a:latin typeface="Hiragino Sans"/>
+              </a:rPr>
+              <a:t>新Mac（ハイスペック）</a:t>
+            </a:r>
+          </a:p>
+        </p:txBody>
+      </p:sp>
+      <p:sp>
+        <p:nvSpPr>
+          <p:cNvPr id="26" name="Rectangle 25"/>
+          <p:cNvSpPr/>
+          <p:nvPr/>
+        </p:nvSpPr>
+        <p:spPr>
+          <a:xfrm>
+            <a:off x="3429000" y="3767328"/>
+            <a:ext cx="4206240" cy="512064"/>
+          </a:xfrm>
+          <a:prstGeom prst="rect">
+            <a:avLst/>
+          </a:prstGeom>
+          <a:solidFill>
+            <a:srgbClr val="ECE8DF"/>
+          </a:solidFill>
+          <a:ln w="10160">
+            <a:solidFill>
+              <a:srgbClr val="E1DACB"/>
+            </a:solidFill>
+          </a:ln>
+          <a:effectLst/>
+        </p:spPr>
+        <p:style>
+          <a:lnRef idx="1">
+            <a:schemeClr val="accent1"/>
+          </a:lnRef>
+          <a:fillRef idx="3">
+            <a:schemeClr val="accent1"/>
+          </a:fillRef>
+          <a:effectRef idx="2">
+            <a:schemeClr val="accent1"/>
+          </a:effectRef>
+          <a:fontRef idx="minor">
+            <a:schemeClr val="lt1"/>
+          </a:fontRef>
+        </p:style>
+        <p:txBody>
+          <a:bodyPr rtlCol="0" anchor="ctr"/>
+          <a:lstStyle/>
+          <a:p>
+            <a:pPr algn="ctr"/>
+          </a:p>
+        </p:txBody>
+      </p:sp>
+      <p:sp>
+        <p:nvSpPr>
+          <p:cNvPr id="27" name="TextBox 26"/>
+          <p:cNvSpPr txBox="1"/>
+          <p:nvPr/>
+        </p:nvSpPr>
+        <p:spPr>
+          <a:xfrm>
+            <a:off x="3575304" y="3767328"/>
+            <a:ext cx="3950208" cy="512064"/>
+          </a:xfrm>
+          <a:prstGeom prst="rect">
+            <a:avLst/>
+          </a:prstGeom>
+          <a:noFill/>
+        </p:spPr>
+        <p:txBody>
+          <a:bodyPr wrap="square" anchor="ctr">
+            <a:spAutoFit/>
+          </a:bodyPr>
+          <a:lstStyle/>
+          <a:p>
+            <a:pPr algn="l">
+              <a:lnSpc>
+                <a:spcPct val="100000"/>
+              </a:lnSpc>
+            </a:pPr>
+            <a:r>
+              <a:rPr sz="1100" b="0" i="0">
+                <a:solidFill>
+                  <a:srgbClr val="1A1A1A"/>
+                </a:solidFill>
+                <a:latin typeface="Hiragino Sans"/>
+              </a:rPr>
+              <a:t>打席機。基本は旧Macに入る／圏外時だけローカル</a:t>
+            </a:r>
+          </a:p>
+        </p:txBody>
+      </p:sp>
+      <p:sp>
+        <p:nvSpPr>
+          <p:cNvPr id="28" name="Rectangle 27"/>
+          <p:cNvSpPr/>
+          <p:nvPr/>
+        </p:nvSpPr>
+        <p:spPr>
+          <a:xfrm>
+            <a:off x="7635240" y="3767328"/>
+            <a:ext cx="4050791" cy="512064"/>
+          </a:xfrm>
+          <a:prstGeom prst="rect">
+            <a:avLst/>
+          </a:prstGeom>
+          <a:solidFill>
+            <a:srgbClr val="ECE8DF"/>
+          </a:solidFill>
+          <a:ln w="10160">
+            <a:solidFill>
+              <a:srgbClr val="E1DACB"/>
+            </a:solidFill>
+          </a:ln>
+          <a:effectLst/>
+        </p:spPr>
+        <p:style>
+          <a:lnRef idx="1">
+            <a:schemeClr val="accent1"/>
+          </a:lnRef>
+          <a:fillRef idx="3">
+            <a:schemeClr val="accent1"/>
+          </a:fillRef>
+          <a:effectRef idx="2">
+            <a:schemeClr val="accent1"/>
+          </a:effectRef>
+          <a:fontRef idx="minor">
+            <a:schemeClr val="lt1"/>
+          </a:fontRef>
+        </p:style>
+        <p:txBody>
+          <a:bodyPr rtlCol="0" anchor="ctr"/>
+          <a:lstStyle/>
+          <a:p>
+            <a:pPr algn="ctr"/>
+          </a:p>
+        </p:txBody>
+      </p:sp>
+      <p:sp>
+        <p:nvSpPr>
+          <p:cNvPr id="29" name="TextBox 28"/>
+          <p:cNvSpPr txBox="1"/>
+          <p:nvPr/>
+        </p:nvSpPr>
+        <p:spPr>
+          <a:xfrm>
+            <a:off x="7781544" y="3767328"/>
+            <a:ext cx="3794759" cy="512064"/>
+          </a:xfrm>
+          <a:prstGeom prst="rect">
+            <a:avLst/>
+          </a:prstGeom>
+          <a:noFill/>
+        </p:spPr>
+        <p:txBody>
+          <a:bodyPr wrap="square" anchor="ctr">
+            <a:spAutoFit/>
+          </a:bodyPr>
+          <a:lstStyle/>
+          <a:p>
+            <a:pPr algn="l">
+              <a:lnSpc>
+                <a:spcPct val="100000"/>
+              </a:lnSpc>
+            </a:pPr>
+            <a:r>
+              <a:rPr sz="1100" b="0" i="0">
+                <a:solidFill>
+                  <a:srgbClr val="1A1A1A"/>
+                </a:solidFill>
+                <a:latin typeface="Hiragino Sans"/>
+              </a:rPr>
+              <a:t>入るだけ＝超軽い(ブラウザ1枚)。ローカル起動時のみClaude分のRAM</a:t>
+            </a:r>
+          </a:p>
+        </p:txBody>
+      </p:sp>
+      <p:sp>
+        <p:nvSpPr>
+          <p:cNvPr id="30" name="Rectangle 29"/>
+          <p:cNvSpPr/>
+          <p:nvPr/>
+        </p:nvSpPr>
+        <p:spPr>
+          <a:xfrm>
+            <a:off x="502920" y="4279392"/>
+            <a:ext cx="2926080" cy="512064"/>
           </a:xfrm>
           <a:prstGeom prst="rect">
             <a:avLst/>
@@ -9917,14 +10556,14 @@
       </p:sp>
       <p:sp>
         <p:nvSpPr>
-          <p:cNvPr id="17" name="TextBox 16"/>
-          <p:cNvSpPr txBox="1"/>
-          <p:nvPr/>
-        </p:nvSpPr>
-        <p:spPr>
-          <a:xfrm>
-            <a:off x="667512" y="2395728"/>
-            <a:ext cx="3474719" cy="566928"/>
+          <p:cNvPr id="31" name="TextBox 30"/>
+          <p:cNvSpPr txBox="1"/>
+          <p:nvPr/>
+        </p:nvSpPr>
+        <p:spPr>
+          <a:xfrm>
+            <a:off x="649224" y="4279392"/>
+            <a:ext cx="2670048" cy="512064"/>
           </a:xfrm>
           <a:prstGeom prst="rect">
             <a:avLst/>
@@ -9937,29 +10576,33 @@
           </a:bodyPr>
           <a:lstStyle/>
           <a:p>
-            <a:pPr algn="l"/>
-            <a:r>
-              <a:rPr sz="1150" b="1" i="0">
+            <a:pPr algn="l">
+              <a:lnSpc>
+                <a:spcPct val="100000"/>
+              </a:lnSpc>
+            </a:pPr>
+            <a:r>
+              <a:rPr sz="1100" b="1" i="0">
                 <a:solidFill>
                   <a:srgbClr val="1A1A1A"/>
                 </a:solidFill>
                 <a:latin typeface="Hiragino Sans"/>
               </a:rPr>
-              <a:t>① Remote Control（本命）</a:t>
-            </a:r>
-          </a:p>
-        </p:txBody>
-      </p:sp>
-      <p:sp>
-        <p:nvSpPr>
-          <p:cNvPr id="18" name="Rectangle 17"/>
+              <a:t>ゆーしMac</a:t>
+            </a:r>
+          </a:p>
+        </p:txBody>
+      </p:sp>
+      <p:sp>
+        <p:nvSpPr>
+          <p:cNvPr id="32" name="Rectangle 31"/>
           <p:cNvSpPr/>
           <p:nvPr/>
         </p:nvSpPr>
         <p:spPr>
           <a:xfrm>
-            <a:off x="4251959" y="2395728"/>
-            <a:ext cx="2194560" cy="566928"/>
+            <a:off x="3429000" y="4279392"/>
+            <a:ext cx="4206240" cy="512064"/>
           </a:xfrm>
           <a:prstGeom prst="rect">
             <a:avLst/>
@@ -9998,14 +10641,14 @@
       </p:sp>
       <p:sp>
         <p:nvSpPr>
-          <p:cNvPr id="19" name="TextBox 18"/>
-          <p:cNvSpPr txBox="1"/>
-          <p:nvPr/>
-        </p:nvSpPr>
-        <p:spPr>
-          <a:xfrm>
-            <a:off x="4416551" y="2395728"/>
-            <a:ext cx="1920240" cy="566928"/>
+          <p:cNvPr id="33" name="TextBox 32"/>
+          <p:cNvSpPr txBox="1"/>
+          <p:nvPr/>
+        </p:nvSpPr>
+        <p:spPr>
+          <a:xfrm>
+            <a:off x="3575304" y="4279392"/>
+            <a:ext cx="3950208" cy="512064"/>
           </a:xfrm>
           <a:prstGeom prst="rect">
             <a:avLst/>
@@ -10018,29 +10661,33 @@
           </a:bodyPr>
           <a:lstStyle/>
           <a:p>
-            <a:pPr algn="l"/>
-            <a:r>
-              <a:rPr sz="1150" b="0" i="0">
+            <a:pPr algn="l">
+              <a:lnSpc>
+                <a:spcPct val="100000"/>
+              </a:lnSpc>
+            </a:pPr>
+            <a:r>
+              <a:rPr sz="1100" b="0" i="0">
                 <a:solidFill>
                   <a:srgbClr val="1A1A1A"/>
                 </a:solidFill>
                 <a:latin typeface="Hiragino Sans"/>
               </a:rPr>
-              <a:t>低・5分</a:t>
-            </a:r>
-          </a:p>
-        </p:txBody>
-      </p:sp>
-      <p:sp>
-        <p:nvSpPr>
-          <p:cNvPr id="20" name="Rectangle 19"/>
+              <a:t>旧Macに入るだけ</a:t>
+            </a:r>
+          </a:p>
+        </p:txBody>
+      </p:sp>
+      <p:sp>
+        <p:nvSpPr>
+          <p:cNvPr id="34" name="Rectangle 33"/>
           <p:cNvSpPr/>
           <p:nvPr/>
         </p:nvSpPr>
         <p:spPr>
           <a:xfrm>
-            <a:off x="6446519" y="2395728"/>
-            <a:ext cx="3657600" cy="566928"/>
+            <a:off x="7635240" y="4279392"/>
+            <a:ext cx="4050791" cy="512064"/>
           </a:xfrm>
           <a:prstGeom prst="rect">
             <a:avLst/>
@@ -10079,14 +10726,14 @@
       </p:sp>
       <p:sp>
         <p:nvSpPr>
-          <p:cNvPr id="21" name="TextBox 20"/>
-          <p:cNvSpPr txBox="1"/>
-          <p:nvPr/>
-        </p:nvSpPr>
-        <p:spPr>
-          <a:xfrm>
-            <a:off x="6611111" y="2395728"/>
-            <a:ext cx="3383280" cy="566928"/>
+          <p:cNvPr id="35" name="TextBox 34"/>
+          <p:cNvSpPr txBox="1"/>
+          <p:nvPr/>
+        </p:nvSpPr>
+        <p:spPr>
+          <a:xfrm>
+            <a:off x="7781544" y="4279392"/>
+            <a:ext cx="3794759" cy="512064"/>
           </a:xfrm>
           <a:prstGeom prst="rect">
             <a:avLst/>
@@ -10099,110 +10746,33 @@
           </a:bodyPr>
           <a:lstStyle/>
           <a:p>
-            <a:pPr algn="l"/>
-            <a:r>
-              <a:rPr sz="1150" b="0" i="0">
+            <a:pPr algn="l">
+              <a:lnSpc>
+                <a:spcPct val="100000"/>
+              </a:lnSpc>
+            </a:pPr>
+            <a:r>
+              <a:rPr sz="1100" b="0" i="0">
                 <a:solidFill>
                   <a:srgbClr val="1A1A1A"/>
                 </a:solidFill>
                 <a:latin typeface="Hiragino Sans"/>
               </a:rPr>
-              <a:t>アプリで快適。打席の合間に確認・指示</a:t>
-            </a:r>
-          </a:p>
-        </p:txBody>
-      </p:sp>
-      <p:sp>
-        <p:nvSpPr>
-          <p:cNvPr id="22" name="Rectangle 21"/>
+              <a:t>超軽い(ブラウザ1枚)。本体メモリはほぼ食わない</a:t>
+            </a:r>
+          </a:p>
+        </p:txBody>
+      </p:sp>
+      <p:sp>
+        <p:nvSpPr>
+          <p:cNvPr id="36" name="Rectangle 35"/>
           <p:cNvSpPr/>
           <p:nvPr/>
         </p:nvSpPr>
         <p:spPr>
           <a:xfrm>
-            <a:off x="10104119" y="2395728"/>
-            <a:ext cx="1581912" cy="566928"/>
-          </a:xfrm>
-          <a:prstGeom prst="rect">
-            <a:avLst/>
-          </a:prstGeom>
-          <a:solidFill>
-            <a:srgbClr val="F4E4E2"/>
-          </a:solidFill>
-          <a:ln w="10160">
-            <a:solidFill>
-              <a:srgbClr val="E1DACB"/>
-            </a:solidFill>
-          </a:ln>
-          <a:effectLst/>
-        </p:spPr>
-        <p:style>
-          <a:lnRef idx="1">
-            <a:schemeClr val="accent1"/>
-          </a:lnRef>
-          <a:fillRef idx="3">
-            <a:schemeClr val="accent1"/>
-          </a:fillRef>
-          <a:effectRef idx="2">
-            <a:schemeClr val="accent1"/>
-          </a:effectRef>
-          <a:fontRef idx="minor">
-            <a:schemeClr val="lt1"/>
-          </a:fontRef>
-        </p:style>
-        <p:txBody>
-          <a:bodyPr rtlCol="0" anchor="ctr"/>
-          <a:lstStyle/>
-          <a:p>
-            <a:pPr algn="ctr"/>
-          </a:p>
-        </p:txBody>
-      </p:sp>
-      <p:sp>
-        <p:nvSpPr>
-          <p:cNvPr id="23" name="TextBox 22"/>
-          <p:cNvSpPr txBox="1"/>
-          <p:nvPr/>
-        </p:nvSpPr>
-        <p:spPr>
-          <a:xfrm>
-            <a:off x="10268711" y="2395728"/>
-            <a:ext cx="1307592" cy="566928"/>
-          </a:xfrm>
-          <a:prstGeom prst="rect">
-            <a:avLst/>
-          </a:prstGeom>
-          <a:noFill/>
-        </p:spPr>
-        <p:txBody>
-          <a:bodyPr wrap="square" anchor="ctr">
-            <a:spAutoFit/>
-          </a:bodyPr>
-          <a:lstStyle/>
-          <a:p>
-            <a:pPr algn="ctr"/>
-            <a:r>
-              <a:rPr sz="1150" b="1" i="0">
-                <a:solidFill>
-                  <a:srgbClr val="8C241D"/>
-                </a:solidFill>
-                <a:latin typeface="Hiragino Sans"/>
-              </a:rPr>
-              <a:t>★★★★★</a:t>
-            </a:r>
-          </a:p>
-        </p:txBody>
-      </p:sp>
-      <p:sp>
-        <p:nvSpPr>
-          <p:cNvPr id="24" name="Rectangle 23"/>
-          <p:cNvSpPr/>
-          <p:nvPr/>
-        </p:nvSpPr>
-        <p:spPr>
-          <a:xfrm>
-            <a:off x="502920" y="2962656"/>
-            <a:ext cx="3749039" cy="566928"/>
+            <a:off x="502920" y="4791456"/>
+            <a:ext cx="2926080" cy="512064"/>
           </a:xfrm>
           <a:prstGeom prst="rect">
             <a:avLst/>
@@ -10241,14 +10811,14 @@
       </p:sp>
       <p:sp>
         <p:nvSpPr>
-          <p:cNvPr id="25" name="TextBox 24"/>
-          <p:cNvSpPr txBox="1"/>
-          <p:nvPr/>
-        </p:nvSpPr>
-        <p:spPr>
-          <a:xfrm>
-            <a:off x="667512" y="2962656"/>
-            <a:ext cx="3474719" cy="566928"/>
+          <p:cNvPr id="37" name="TextBox 36"/>
+          <p:cNvSpPr txBox="1"/>
+          <p:nvPr/>
+        </p:nvSpPr>
+        <p:spPr>
+          <a:xfrm>
+            <a:off x="649224" y="4791456"/>
+            <a:ext cx="2670048" cy="512064"/>
           </a:xfrm>
           <a:prstGeom prst="rect">
             <a:avLst/>
@@ -10261,29 +10831,33 @@
           </a:bodyPr>
           <a:lstStyle/>
           <a:p>
-            <a:pPr algn="l"/>
-            <a:r>
-              <a:rPr sz="1150" b="1" i="0">
+            <a:pPr algn="l">
+              <a:lnSpc>
+                <a:spcPct val="100000"/>
+              </a:lnSpc>
+            </a:pPr>
+            <a:r>
+              <a:rPr sz="1100" b="1" i="0">
                 <a:solidFill>
                   <a:srgbClr val="1A1A1A"/>
                 </a:solidFill>
                 <a:latin typeface="Hiragino Sans"/>
               </a:rPr>
-              <a:t>② SSH+Tailscale+Blink</a:t>
-            </a:r>
-          </a:p>
-        </p:txBody>
-      </p:sp>
-      <p:sp>
-        <p:nvSpPr>
-          <p:cNvPr id="26" name="Rectangle 25"/>
+              <a:t>スマホ</a:t>
+            </a:r>
+          </a:p>
+        </p:txBody>
+      </p:sp>
+      <p:sp>
+        <p:nvSpPr>
+          <p:cNvPr id="38" name="Rectangle 37"/>
           <p:cNvSpPr/>
           <p:nvPr/>
         </p:nvSpPr>
         <p:spPr>
           <a:xfrm>
-            <a:off x="4251959" y="2962656"/>
-            <a:ext cx="2194560" cy="566928"/>
+            <a:off x="3429000" y="4791456"/>
+            <a:ext cx="4206240" cy="512064"/>
           </a:xfrm>
           <a:prstGeom prst="rect">
             <a:avLst/>
@@ -10322,14 +10896,14 @@
       </p:sp>
       <p:sp>
         <p:nvSpPr>
-          <p:cNvPr id="27" name="TextBox 26"/>
-          <p:cNvSpPr txBox="1"/>
-          <p:nvPr/>
-        </p:nvSpPr>
-        <p:spPr>
-          <a:xfrm>
-            <a:off x="4416551" y="2962656"/>
-            <a:ext cx="1920240" cy="566928"/>
+          <p:cNvPr id="39" name="TextBox 38"/>
+          <p:cNvSpPr txBox="1"/>
+          <p:nvPr/>
+        </p:nvSpPr>
+        <p:spPr>
+          <a:xfrm>
+            <a:off x="3575304" y="4791456"/>
+            <a:ext cx="3950208" cy="512064"/>
           </a:xfrm>
           <a:prstGeom prst="rect">
             <a:avLst/>
@@ -10342,29 +10916,33 @@
           </a:bodyPr>
           <a:lstStyle/>
           <a:p>
-            <a:pPr algn="l"/>
-            <a:r>
-              <a:rPr sz="1150" b="0" i="0">
+            <a:pPr algn="l">
+              <a:lnSpc>
+                <a:spcPct val="100000"/>
+              </a:lnSpc>
+            </a:pPr>
+            <a:r>
+              <a:rPr sz="1100" b="0" i="0">
                 <a:solidFill>
                   <a:srgbClr val="1A1A1A"/>
                 </a:solidFill>
                 <a:latin typeface="Hiragino Sans"/>
               </a:rPr>
-              <a:t>中・30分</a:t>
-            </a:r>
-          </a:p>
-        </p:txBody>
-      </p:sp>
-      <p:sp>
-        <p:nvSpPr>
-          <p:cNvPr id="28" name="Rectangle 27"/>
+              <a:t>旧Macに入るだけ</a:t>
+            </a:r>
+          </a:p>
+        </p:txBody>
+      </p:sp>
+      <p:sp>
+        <p:nvSpPr>
+          <p:cNvPr id="40" name="Rectangle 39"/>
           <p:cNvSpPr/>
           <p:nvPr/>
         </p:nvSpPr>
         <p:spPr>
           <a:xfrm>
-            <a:off x="6446519" y="2962656"/>
-            <a:ext cx="3657600" cy="566928"/>
+            <a:off x="7635240" y="4791456"/>
+            <a:ext cx="4050791" cy="512064"/>
           </a:xfrm>
           <a:prstGeom prst="rect">
             <a:avLst/>
@@ -10403,14 +10981,14 @@
       </p:sp>
       <p:sp>
         <p:nvSpPr>
-          <p:cNvPr id="29" name="TextBox 28"/>
-          <p:cNvSpPr txBox="1"/>
-          <p:nvPr/>
-        </p:nvSpPr>
-        <p:spPr>
-          <a:xfrm>
-            <a:off x="6611111" y="2962656"/>
-            <a:ext cx="3383280" cy="566928"/>
+          <p:cNvPr id="41" name="TextBox 40"/>
+          <p:cNvSpPr txBox="1"/>
+          <p:nvPr/>
+        </p:nvSpPr>
+        <p:spPr>
+          <a:xfrm>
+            <a:off x="7781544" y="4791456"/>
+            <a:ext cx="3794759" cy="512064"/>
           </a:xfrm>
           <a:prstGeom prst="rect">
             <a:avLst/>
@@ -10423,29 +11001,33 @@
           </a:bodyPr>
           <a:lstStyle/>
           <a:p>
-            <a:pPr algn="l"/>
-            <a:r>
-              <a:rPr sz="1150" b="0" i="0">
+            <a:pPr algn="l">
+              <a:lnSpc>
+                <a:spcPct val="100000"/>
+              </a:lnSpc>
+            </a:pPr>
+            <a:r>
+              <a:rPr sz="1100" b="0" i="0">
                 <a:solidFill>
                   <a:srgbClr val="1A1A1A"/>
                 </a:solidFill>
                 <a:latin typeface="Hiragino Sans"/>
               </a:rPr>
-              <a:t>ターミナル常駐。画面は小さい</a:t>
-            </a:r>
-          </a:p>
-        </p:txBody>
-      </p:sp>
-      <p:sp>
-        <p:nvSpPr>
-          <p:cNvPr id="30" name="Rectangle 29"/>
+              <a:t>アプリ1つ。負荷ほぼゼロ</a:t>
+            </a:r>
+          </a:p>
+        </p:txBody>
+      </p:sp>
+      <p:sp>
+        <p:nvSpPr>
+          <p:cNvPr id="42" name="Rectangle 41"/>
           <p:cNvSpPr/>
           <p:nvPr/>
         </p:nvSpPr>
         <p:spPr>
           <a:xfrm>
-            <a:off x="10104119" y="2962656"/>
-            <a:ext cx="1581912" cy="566928"/>
+            <a:off x="502920" y="5440680"/>
+            <a:ext cx="11183112" cy="868680"/>
           </a:xfrm>
           <a:prstGeom prst="rect">
             <a:avLst/>
@@ -10453,10 +11035,8 @@
           <a:solidFill>
             <a:srgbClr val="F4E4E2"/>
           </a:solidFill>
-          <a:ln w="10160">
-            <a:solidFill>
-              <a:srgbClr val="E1DACB"/>
-            </a:solidFill>
+          <a:ln>
+            <a:noFill/>
           </a:ln>
           <a:effectLst/>
         </p:spPr>
@@ -10484,419 +11064,14 @@
       </p:sp>
       <p:sp>
         <p:nvSpPr>
-          <p:cNvPr id="31" name="TextBox 30"/>
-          <p:cNvSpPr txBox="1"/>
-          <p:nvPr/>
-        </p:nvSpPr>
-        <p:spPr>
-          <a:xfrm>
-            <a:off x="10268711" y="2962656"/>
-            <a:ext cx="1307592" cy="566928"/>
-          </a:xfrm>
-          <a:prstGeom prst="rect">
-            <a:avLst/>
-          </a:prstGeom>
-          <a:noFill/>
-        </p:spPr>
-        <p:txBody>
-          <a:bodyPr wrap="square" anchor="ctr">
-            <a:spAutoFit/>
-          </a:bodyPr>
-          <a:lstStyle/>
-          <a:p>
-            <a:pPr algn="ctr"/>
-            <a:r>
-              <a:rPr sz="1150" b="1" i="0">
-                <a:solidFill>
-                  <a:srgbClr val="8C241D"/>
-                </a:solidFill>
-                <a:latin typeface="Hiragino Sans"/>
-              </a:rPr>
-              <a:t>★★★★</a:t>
-            </a:r>
-          </a:p>
-        </p:txBody>
-      </p:sp>
-      <p:sp>
-        <p:nvSpPr>
-          <p:cNvPr id="32" name="Rectangle 31"/>
+          <p:cNvPr id="43" name="Rectangle 42"/>
           <p:cNvSpPr/>
           <p:nvPr/>
         </p:nvSpPr>
         <p:spPr>
           <a:xfrm>
-            <a:off x="502920" y="3529584"/>
-            <a:ext cx="3749039" cy="566928"/>
-          </a:xfrm>
-          <a:prstGeom prst="rect">
-            <a:avLst/>
-          </a:prstGeom>
-          <a:solidFill>
-            <a:srgbClr val="F1ECE1"/>
-          </a:solidFill>
-          <a:ln w="10160">
-            <a:solidFill>
-              <a:srgbClr val="E1DACB"/>
-            </a:solidFill>
-          </a:ln>
-          <a:effectLst/>
-        </p:spPr>
-        <p:style>
-          <a:lnRef idx="1">
-            <a:schemeClr val="accent1"/>
-          </a:lnRef>
-          <a:fillRef idx="3">
-            <a:schemeClr val="accent1"/>
-          </a:fillRef>
-          <a:effectRef idx="2">
-            <a:schemeClr val="accent1"/>
-          </a:effectRef>
-          <a:fontRef idx="minor">
-            <a:schemeClr val="lt1"/>
-          </a:fontRef>
-        </p:style>
-        <p:txBody>
-          <a:bodyPr rtlCol="0" anchor="ctr"/>
-          <a:lstStyle/>
-          <a:p>
-            <a:pPr algn="ctr"/>
-          </a:p>
-        </p:txBody>
-      </p:sp>
-      <p:sp>
-        <p:nvSpPr>
-          <p:cNvPr id="33" name="TextBox 32"/>
-          <p:cNvSpPr txBox="1"/>
-          <p:nvPr/>
-        </p:nvSpPr>
-        <p:spPr>
-          <a:xfrm>
-            <a:off x="667512" y="3529584"/>
-            <a:ext cx="3474719" cy="566928"/>
-          </a:xfrm>
-          <a:prstGeom prst="rect">
-            <a:avLst/>
-          </a:prstGeom>
-          <a:noFill/>
-        </p:spPr>
-        <p:txBody>
-          <a:bodyPr wrap="square" anchor="ctr">
-            <a:spAutoFit/>
-          </a:bodyPr>
-          <a:lstStyle/>
-          <a:p>
-            <a:pPr algn="l"/>
-            <a:r>
-              <a:rPr sz="1150" b="1" i="0">
-                <a:solidFill>
-                  <a:srgbClr val="1A1A1A"/>
-                </a:solidFill>
-                <a:latin typeface="Hiragino Sans"/>
-              </a:rPr>
-              <a:t>③ リモートデスク(Jump等)</a:t>
-            </a:r>
-          </a:p>
-        </p:txBody>
-      </p:sp>
-      <p:sp>
-        <p:nvSpPr>
-          <p:cNvPr id="34" name="Rectangle 33"/>
-          <p:cNvSpPr/>
-          <p:nvPr/>
-        </p:nvSpPr>
-        <p:spPr>
-          <a:xfrm>
-            <a:off x="4251959" y="3529584"/>
-            <a:ext cx="2194560" cy="566928"/>
-          </a:xfrm>
-          <a:prstGeom prst="rect">
-            <a:avLst/>
-          </a:prstGeom>
-          <a:solidFill>
-            <a:srgbClr val="F1ECE1"/>
-          </a:solidFill>
-          <a:ln w="10160">
-            <a:solidFill>
-              <a:srgbClr val="E1DACB"/>
-            </a:solidFill>
-          </a:ln>
-          <a:effectLst/>
-        </p:spPr>
-        <p:style>
-          <a:lnRef idx="1">
-            <a:schemeClr val="accent1"/>
-          </a:lnRef>
-          <a:fillRef idx="3">
-            <a:schemeClr val="accent1"/>
-          </a:fillRef>
-          <a:effectRef idx="2">
-            <a:schemeClr val="accent1"/>
-          </a:effectRef>
-          <a:fontRef idx="minor">
-            <a:schemeClr val="lt1"/>
-          </a:fontRef>
-        </p:style>
-        <p:txBody>
-          <a:bodyPr rtlCol="0" anchor="ctr"/>
-          <a:lstStyle/>
-          <a:p>
-            <a:pPr algn="ctr"/>
-          </a:p>
-        </p:txBody>
-      </p:sp>
-      <p:sp>
-        <p:nvSpPr>
-          <p:cNvPr id="35" name="TextBox 34"/>
-          <p:cNvSpPr txBox="1"/>
-          <p:nvPr/>
-        </p:nvSpPr>
-        <p:spPr>
-          <a:xfrm>
-            <a:off x="4416551" y="3529584"/>
-            <a:ext cx="1920240" cy="566928"/>
-          </a:xfrm>
-          <a:prstGeom prst="rect">
-            <a:avLst/>
-          </a:prstGeom>
-          <a:noFill/>
-        </p:spPr>
-        <p:txBody>
-          <a:bodyPr wrap="square" anchor="ctr">
-            <a:spAutoFit/>
-          </a:bodyPr>
-          <a:lstStyle/>
-          <a:p>
-            <a:pPr algn="l"/>
-            <a:r>
-              <a:rPr sz="1150" b="0" i="0">
-                <a:solidFill>
-                  <a:srgbClr val="1A1A1A"/>
-                </a:solidFill>
-                <a:latin typeface="Hiragino Sans"/>
-              </a:rPr>
-              <a:t>低</a:t>
-            </a:r>
-          </a:p>
-        </p:txBody>
-      </p:sp>
-      <p:sp>
-        <p:nvSpPr>
-          <p:cNvPr id="36" name="Rectangle 35"/>
-          <p:cNvSpPr/>
-          <p:nvPr/>
-        </p:nvSpPr>
-        <p:spPr>
-          <a:xfrm>
-            <a:off x="6446519" y="3529584"/>
-            <a:ext cx="3657600" cy="566928"/>
-          </a:xfrm>
-          <a:prstGeom prst="rect">
-            <a:avLst/>
-          </a:prstGeom>
-          <a:solidFill>
-            <a:srgbClr val="F1ECE1"/>
-          </a:solidFill>
-          <a:ln w="10160">
-            <a:solidFill>
-              <a:srgbClr val="E1DACB"/>
-            </a:solidFill>
-          </a:ln>
-          <a:effectLst/>
-        </p:spPr>
-        <p:style>
-          <a:lnRef idx="1">
-            <a:schemeClr val="accent1"/>
-          </a:lnRef>
-          <a:fillRef idx="3">
-            <a:schemeClr val="accent1"/>
-          </a:fillRef>
-          <a:effectRef idx="2">
-            <a:schemeClr val="accent1"/>
-          </a:effectRef>
-          <a:fontRef idx="minor">
-            <a:schemeClr val="lt1"/>
-          </a:fontRef>
-        </p:style>
-        <p:txBody>
-          <a:bodyPr rtlCol="0" anchor="ctr"/>
-          <a:lstStyle/>
-          <a:p>
-            <a:pPr algn="ctr"/>
-          </a:p>
-        </p:txBody>
-      </p:sp>
-      <p:sp>
-        <p:nvSpPr>
-          <p:cNvPr id="37" name="TextBox 36"/>
-          <p:cNvSpPr txBox="1"/>
-          <p:nvPr/>
-        </p:nvSpPr>
-        <p:spPr>
-          <a:xfrm>
-            <a:off x="6611111" y="3529584"/>
-            <a:ext cx="3383280" cy="566928"/>
-          </a:xfrm>
-          <a:prstGeom prst="rect">
-            <a:avLst/>
-          </a:prstGeom>
-          <a:noFill/>
-        </p:spPr>
-        <p:txBody>
-          <a:bodyPr wrap="square" anchor="ctr">
-            <a:spAutoFit/>
-          </a:bodyPr>
-          <a:lstStyle/>
-          <a:p>
-            <a:pPr algn="l"/>
-            <a:r>
-              <a:rPr sz="1150" b="0" i="0">
-                <a:solidFill>
-                  <a:srgbClr val="1A1A1A"/>
-                </a:solidFill>
-                <a:latin typeface="Hiragino Sans"/>
-              </a:rPr>
-              <a:t>Mac画面ごと操作。遅く見づらい</a:t>
-            </a:r>
-          </a:p>
-        </p:txBody>
-      </p:sp>
-      <p:sp>
-        <p:nvSpPr>
-          <p:cNvPr id="38" name="Rectangle 37"/>
-          <p:cNvSpPr/>
-          <p:nvPr/>
-        </p:nvSpPr>
-        <p:spPr>
-          <a:xfrm>
-            <a:off x="10104119" y="3529584"/>
-            <a:ext cx="1581912" cy="566928"/>
-          </a:xfrm>
-          <a:prstGeom prst="rect">
-            <a:avLst/>
-          </a:prstGeom>
-          <a:solidFill>
-            <a:srgbClr val="F4E4E2"/>
-          </a:solidFill>
-          <a:ln w="10160">
-            <a:solidFill>
-              <a:srgbClr val="E1DACB"/>
-            </a:solidFill>
-          </a:ln>
-          <a:effectLst/>
-        </p:spPr>
-        <p:style>
-          <a:lnRef idx="1">
-            <a:schemeClr val="accent1"/>
-          </a:lnRef>
-          <a:fillRef idx="3">
-            <a:schemeClr val="accent1"/>
-          </a:fillRef>
-          <a:effectRef idx="2">
-            <a:schemeClr val="accent1"/>
-          </a:effectRef>
-          <a:fontRef idx="minor">
-            <a:schemeClr val="lt1"/>
-          </a:fontRef>
-        </p:style>
-        <p:txBody>
-          <a:bodyPr rtlCol="0" anchor="ctr"/>
-          <a:lstStyle/>
-          <a:p>
-            <a:pPr algn="ctr"/>
-          </a:p>
-        </p:txBody>
-      </p:sp>
-      <p:sp>
-        <p:nvSpPr>
-          <p:cNvPr id="39" name="TextBox 38"/>
-          <p:cNvSpPr txBox="1"/>
-          <p:nvPr/>
-        </p:nvSpPr>
-        <p:spPr>
-          <a:xfrm>
-            <a:off x="10268711" y="3529584"/>
-            <a:ext cx="1307592" cy="566928"/>
-          </a:xfrm>
-          <a:prstGeom prst="rect">
-            <a:avLst/>
-          </a:prstGeom>
-          <a:noFill/>
-        </p:spPr>
-        <p:txBody>
-          <a:bodyPr wrap="square" anchor="ctr">
-            <a:spAutoFit/>
-          </a:bodyPr>
-          <a:lstStyle/>
-          <a:p>
-            <a:pPr algn="ctr"/>
-            <a:r>
-              <a:rPr sz="1150" b="1" i="0">
-                <a:solidFill>
-                  <a:srgbClr val="8C241D"/>
-                </a:solidFill>
-                <a:latin typeface="Hiragino Sans"/>
-              </a:rPr>
-              <a:t>★★★</a:t>
-            </a:r>
-          </a:p>
-        </p:txBody>
-      </p:sp>
-      <p:sp>
-        <p:nvSpPr>
-          <p:cNvPr id="40" name="Rectangle 39"/>
-          <p:cNvSpPr/>
-          <p:nvPr/>
-        </p:nvSpPr>
-        <p:spPr>
-          <a:xfrm>
-            <a:off x="502920" y="4526280"/>
-            <a:ext cx="11183112" cy="1508760"/>
-          </a:xfrm>
-          <a:prstGeom prst="rect">
-            <a:avLst/>
-          </a:prstGeom>
-          <a:solidFill>
-            <a:srgbClr val="F1ECE1"/>
-          </a:solidFill>
-          <a:ln w="12700">
-            <a:solidFill>
-              <a:srgbClr val="E1DACB"/>
-            </a:solidFill>
-          </a:ln>
-          <a:effectLst/>
-        </p:spPr>
-        <p:style>
-          <a:lnRef idx="1">
-            <a:schemeClr val="accent1"/>
-          </a:lnRef>
-          <a:fillRef idx="3">
-            <a:schemeClr val="accent1"/>
-          </a:fillRef>
-          <a:effectRef idx="2">
-            <a:schemeClr val="accent1"/>
-          </a:effectRef>
-          <a:fontRef idx="minor">
-            <a:schemeClr val="lt1"/>
-          </a:fontRef>
-        </p:style>
-        <p:txBody>
-          <a:bodyPr rtlCol="0" anchor="ctr"/>
-          <a:lstStyle/>
-          <a:p>
-            <a:pPr algn="ctr"/>
-          </a:p>
-        </p:txBody>
-      </p:sp>
-      <p:sp>
-        <p:nvSpPr>
-          <p:cNvPr id="41" name="Rectangle 40"/>
-          <p:cNvSpPr/>
-          <p:nvPr/>
-        </p:nvSpPr>
-        <p:spPr>
-          <a:xfrm>
-            <a:off x="502920" y="4526280"/>
-            <a:ext cx="11183112" cy="54864"/>
+            <a:off x="502920" y="5440680"/>
+            <a:ext cx="91440" cy="868680"/>
           </a:xfrm>
           <a:prstGeom prst="rect">
             <a:avLst/>
@@ -10933,14 +11108,14 @@
       </p:sp>
       <p:sp>
         <p:nvSpPr>
-          <p:cNvPr id="42" name="TextBox 41"/>
-          <p:cNvSpPr txBox="1"/>
-          <p:nvPr/>
-        </p:nvSpPr>
-        <p:spPr>
-          <a:xfrm>
-            <a:off x="758952" y="4672584"/>
-            <a:ext cx="10725912" cy="411480"/>
+          <p:cNvPr id="44" name="TextBox 43"/>
+          <p:cNvSpPr txBox="1"/>
+          <p:nvPr/>
+        </p:nvSpPr>
+        <p:spPr>
+          <a:xfrm>
+            <a:off x="777240" y="5532120"/>
+            <a:ext cx="10607040" cy="365760"/>
           </a:xfrm>
           <a:prstGeom prst="rect">
             <a:avLst/>
@@ -10955,27 +11130,27 @@
           <a:p>
             <a:pPr algn="l"/>
             <a:r>
-              <a:rPr sz="1500" b="1" i="0">
-                <a:solidFill>
-                  <a:srgbClr val="AA2E26"/>
-                </a:solidFill>
-                <a:latin typeface="Hiragino Sans"/>
-              </a:rPr>
-              <a:t>🔐 セキュリティ（人に勧める時の心得）</a:t>
-            </a:r>
-          </a:p>
-        </p:txBody>
-      </p:sp>
-      <p:sp>
-        <p:nvSpPr>
-          <p:cNvPr id="43" name="TextBox 42"/>
-          <p:cNvSpPr txBox="1"/>
-          <p:nvPr/>
-        </p:nvSpPr>
-        <p:spPr>
-          <a:xfrm>
-            <a:off x="777240" y="5239512"/>
-            <a:ext cx="10634472" cy="502920"/>
+              <a:rPr sz="1400" b="1" i="0">
+                <a:solidFill>
+                  <a:srgbClr val="8C241D"/>
+                </a:solidFill>
+                <a:latin typeface="Hiragino Sans"/>
+              </a:rPr>
+              <a:t>⚠️ 旧Mac＝8GBが全体の上限。常時2セッション＋ゆーし1接続が現実的な天井。</a:t>
+            </a:r>
+          </a:p>
+        </p:txBody>
+      </p:sp>
+      <p:sp>
+        <p:nvSpPr>
+          <p:cNvPr id="45" name="TextBox 44"/>
+          <p:cNvSpPr txBox="1"/>
+          <p:nvPr/>
+        </p:nvSpPr>
+        <p:spPr>
+          <a:xfrm>
+            <a:off x="777240" y="5934456"/>
+            <a:ext cx="10607040" cy="320040"/>
           </a:xfrm>
           <a:prstGeom prst="rect">
             <a:avLst/>
@@ -10988,33 +11163,29 @@
           </a:bodyPr>
           <a:lstStyle/>
           <a:p>
-            <a:pPr algn="l">
-              <a:lnSpc>
-                <a:spcPct val="112000"/>
-              </a:lnSpc>
-            </a:pPr>
-            <a:r>
-              <a:rPr sz="1200" b="0" i="0">
+            <a:pPr algn="l"/>
+            <a:r>
+              <a:rPr sz="1150" b="0" i="0">
                 <a:solidFill>
                   <a:srgbClr val="1A1A1A"/>
                 </a:solidFill>
                 <a:latin typeface="Hiragino Sans"/>
               </a:rPr>
-              <a:t>Remote Control＝コードは自宅Mac上で実行・通信はTLS・ポート開放不要（受け身で安全）。iPhoneを失くしたらアカウント側でデバイス登録を取消せば即遮断。</a:t>
-            </a:r>
-          </a:p>
-        </p:txBody>
-      </p:sp>
-      <p:sp>
-        <p:nvSpPr>
-          <p:cNvPr id="44" name="TextBox 43"/>
-          <p:cNvSpPr txBox="1"/>
-          <p:nvPr/>
-        </p:nvSpPr>
-        <p:spPr>
-          <a:xfrm>
-            <a:off x="777240" y="5742432"/>
-            <a:ext cx="10634472" cy="502920"/>
+              <a:t>重くなったら、入る先を新ハイスペックMac3に切替＝母艦を格上げ（クライアント側は変えなくてOK）。</a:t>
+            </a:r>
+          </a:p>
+        </p:txBody>
+      </p:sp>
+      <p:sp>
+        <p:nvSpPr>
+          <p:cNvPr id="46" name="TextBox 45"/>
+          <p:cNvSpPr txBox="1"/>
+          <p:nvPr/>
+        </p:nvSpPr>
+        <p:spPr>
+          <a:xfrm>
+            <a:off x="548640" y="6364224"/>
+            <a:ext cx="10972800" cy="274320"/>
           </a:xfrm>
           <a:prstGeom prst="rect">
             <a:avLst/>
@@ -11027,19 +11198,15 @@
           </a:bodyPr>
           <a:lstStyle/>
           <a:p>
-            <a:pPr algn="l">
-              <a:lnSpc>
-                <a:spcPct val="112000"/>
-              </a:lnSpc>
-            </a:pPr>
-            <a:r>
-              <a:rPr sz="1200" b="0" i="0">
+            <a:pPr algn="l"/>
+            <a:r>
+              <a:rPr sz="900" b="0" i="0">
                 <a:solidFill>
                   <a:srgbClr val="6E6E6E"/>
                 </a:solidFill>
                 <a:latin typeface="Hiragino Sans"/>
               </a:rPr>
-              <a:t>SSH方式を使うなら必ず Tailscale等の閉域網＋鍵認証。SSHを直接インターネットに開けない。</a:t>
+              <a:t>※実測(2026-06-28 旧Mac)：claude各セッション≒80〜140MB／空きメモリ33%／ロード平均 約2.0（8コア）。</a:t>
             </a:r>
           </a:p>
         </p:txBody>
@@ -11179,7 +11346,7 @@
                 </a:solidFill>
                 <a:latin typeface="Hiragino Sans"/>
               </a:rPr>
-              <a:t>DAILY FLOW</a:t>
+              <a:t>COMPARISON</a:t>
             </a:r>
           </a:p>
         </p:txBody>
@@ -11258,7 +11425,7 @@
                 </a:solidFill>
                 <a:latin typeface="Hiragino Sans"/>
               </a:rPr>
-              <a:t>1日の流れ ── 朝の聖域は守り、打席に集中</a:t>
+              <a:t>3つの方式 ── 迷ったら本命1本でいい</a:t>
             </a:r>
           </a:p>
         </p:txBody>
@@ -11293,7 +11460,7 @@
                 </a:solidFill>
                 <a:latin typeface="Hiragino Sans"/>
               </a:rPr>
-              <a:t>旧Macは裏で回り続ける。第一声は「今日の打席は誰？」</a:t>
+              <a:t>結論：菊池さんは Remote Control 一択。他は知識として</a:t>
             </a:r>
           </a:p>
         </p:txBody>
@@ -11307,16 +11474,18 @@
         <p:spPr>
           <a:xfrm>
             <a:off x="502920" y="1828800"/>
-            <a:ext cx="1371600" cy="914400"/>
+            <a:ext cx="3749039" cy="566928"/>
           </a:xfrm>
           <a:prstGeom prst="rect">
             <a:avLst/>
           </a:prstGeom>
           <a:solidFill>
-            <a:srgbClr val="F4E4E2"/>
+            <a:srgbClr val="AA2E26"/>
           </a:solidFill>
-          <a:ln>
-            <a:noFill/>
+          <a:ln w="10160">
+            <a:solidFill>
+              <a:srgbClr val="E1DACB"/>
+            </a:solidFill>
           </a:ln>
           <a:effectLst/>
         </p:spPr>
@@ -11344,14 +11513,49 @@
       </p:sp>
       <p:sp>
         <p:nvSpPr>
-          <p:cNvPr id="9" name="Rectangle 8"/>
+          <p:cNvPr id="9" name="TextBox 8"/>
+          <p:cNvSpPr txBox="1"/>
+          <p:nvPr/>
+        </p:nvSpPr>
+        <p:spPr>
+          <a:xfrm>
+            <a:off x="667512" y="1828800"/>
+            <a:ext cx="3474719" cy="566928"/>
+          </a:xfrm>
+          <a:prstGeom prst="rect">
+            <a:avLst/>
+          </a:prstGeom>
+          <a:noFill/>
+        </p:spPr>
+        <p:txBody>
+          <a:bodyPr wrap="square" anchor="ctr">
+            <a:spAutoFit/>
+          </a:bodyPr>
+          <a:lstStyle/>
+          <a:p>
+            <a:pPr algn="l"/>
+            <a:r>
+              <a:rPr sz="1200" b="1" i="0">
+                <a:solidFill>
+                  <a:srgbClr val="FFFFFF"/>
+                </a:solidFill>
+                <a:latin typeface="Hiragino Sans"/>
+              </a:rPr>
+              <a:t>方式</a:t>
+            </a:r>
+          </a:p>
+        </p:txBody>
+      </p:sp>
+      <p:sp>
+        <p:nvSpPr>
+          <p:cNvPr id="10" name="Rectangle 9"/>
           <p:cNvSpPr/>
           <p:nvPr/>
         </p:nvSpPr>
         <p:spPr>
           <a:xfrm>
-            <a:off x="502920" y="1828800"/>
-            <a:ext cx="91440" cy="914400"/>
+            <a:off x="4251959" y="1828800"/>
+            <a:ext cx="2194560" cy="566928"/>
           </a:xfrm>
           <a:prstGeom prst="rect">
             <a:avLst/>
@@ -11359,8 +11563,10 @@
           <a:solidFill>
             <a:srgbClr val="AA2E26"/>
           </a:solidFill>
-          <a:ln>
-            <a:noFill/>
+          <a:ln w="10160">
+            <a:solidFill>
+              <a:srgbClr val="E1DACB"/>
+            </a:solidFill>
           </a:ln>
           <a:effectLst/>
         </p:spPr>
@@ -11388,14 +11594,14 @@
       </p:sp>
       <p:sp>
         <p:nvSpPr>
-          <p:cNvPr id="10" name="TextBox 9"/>
-          <p:cNvSpPr txBox="1"/>
-          <p:nvPr/>
-        </p:nvSpPr>
-        <p:spPr>
-          <a:xfrm>
-            <a:off x="502920" y="1828800"/>
-            <a:ext cx="1371600" cy="914400"/>
+          <p:cNvPr id="11" name="TextBox 10"/>
+          <p:cNvSpPr txBox="1"/>
+          <p:nvPr/>
+        </p:nvSpPr>
+        <p:spPr>
+          <a:xfrm>
+            <a:off x="4416551" y="1828800"/>
+            <a:ext cx="1920240" cy="566928"/>
           </a:xfrm>
           <a:prstGeom prst="rect">
             <a:avLst/>
@@ -11408,29 +11614,191 @@
           </a:bodyPr>
           <a:lstStyle/>
           <a:p>
+            <a:pPr algn="l"/>
+            <a:r>
+              <a:rPr sz="1200" b="1" i="0">
+                <a:solidFill>
+                  <a:srgbClr val="FFFFFF"/>
+                </a:solidFill>
+                <a:latin typeface="Hiragino Sans"/>
+              </a:rPr>
+              <a:t>セットアップ</a:t>
+            </a:r>
+          </a:p>
+        </p:txBody>
+      </p:sp>
+      <p:sp>
+        <p:nvSpPr>
+          <p:cNvPr id="12" name="Rectangle 11"/>
+          <p:cNvSpPr/>
+          <p:nvPr/>
+        </p:nvSpPr>
+        <p:spPr>
+          <a:xfrm>
+            <a:off x="6446519" y="1828800"/>
+            <a:ext cx="3657600" cy="566928"/>
+          </a:xfrm>
+          <a:prstGeom prst="rect">
+            <a:avLst/>
+          </a:prstGeom>
+          <a:solidFill>
+            <a:srgbClr val="AA2E26"/>
+          </a:solidFill>
+          <a:ln w="10160">
+            <a:solidFill>
+              <a:srgbClr val="E1DACB"/>
+            </a:solidFill>
+          </a:ln>
+          <a:effectLst/>
+        </p:spPr>
+        <p:style>
+          <a:lnRef idx="1">
+            <a:schemeClr val="accent1"/>
+          </a:lnRef>
+          <a:fillRef idx="3">
+            <a:schemeClr val="accent1"/>
+          </a:fillRef>
+          <a:effectRef idx="2">
+            <a:schemeClr val="accent1"/>
+          </a:effectRef>
+          <a:fontRef idx="minor">
+            <a:schemeClr val="lt1"/>
+          </a:fontRef>
+        </p:style>
+        <p:txBody>
+          <a:bodyPr rtlCol="0" anchor="ctr"/>
+          <a:lstStyle/>
+          <a:p>
             <a:pPr algn="ctr"/>
-            <a:r>
-              <a:rPr sz="1700" b="1" i="0">
-                <a:solidFill>
-                  <a:srgbClr val="8C241D"/>
-                </a:solidFill>
-                <a:latin typeface="Hiragino Sans"/>
-              </a:rPr>
-              <a:t>朝</a:t>
-            </a:r>
-          </a:p>
-        </p:txBody>
-      </p:sp>
-      <p:sp>
-        <p:nvSpPr>
-          <p:cNvPr id="11" name="Rectangle 10"/>
+          </a:p>
+        </p:txBody>
+      </p:sp>
+      <p:sp>
+        <p:nvSpPr>
+          <p:cNvPr id="13" name="TextBox 12"/>
+          <p:cNvSpPr txBox="1"/>
+          <p:nvPr/>
+        </p:nvSpPr>
+        <p:spPr>
+          <a:xfrm>
+            <a:off x="6611111" y="1828800"/>
+            <a:ext cx="3383280" cy="566928"/>
+          </a:xfrm>
+          <a:prstGeom prst="rect">
+            <a:avLst/>
+          </a:prstGeom>
+          <a:noFill/>
+        </p:spPr>
+        <p:txBody>
+          <a:bodyPr wrap="square" anchor="ctr">
+            <a:spAutoFit/>
+          </a:bodyPr>
+          <a:lstStyle/>
+          <a:p>
+            <a:pPr algn="l"/>
+            <a:r>
+              <a:rPr sz="1200" b="1" i="0">
+                <a:solidFill>
+                  <a:srgbClr val="FFFFFF"/>
+                </a:solidFill>
+                <a:latin typeface="Hiragino Sans"/>
+              </a:rPr>
+              <a:t>操作感／用途</a:t>
+            </a:r>
+          </a:p>
+        </p:txBody>
+      </p:sp>
+      <p:sp>
+        <p:nvSpPr>
+          <p:cNvPr id="14" name="Rectangle 13"/>
           <p:cNvSpPr/>
           <p:nvPr/>
         </p:nvSpPr>
         <p:spPr>
           <a:xfrm>
-            <a:off x="2011680" y="1828800"/>
-            <a:ext cx="4709160" cy="914400"/>
+            <a:off x="10104119" y="1828800"/>
+            <a:ext cx="1581912" cy="566928"/>
+          </a:xfrm>
+          <a:prstGeom prst="rect">
+            <a:avLst/>
+          </a:prstGeom>
+          <a:solidFill>
+            <a:srgbClr val="AA2E26"/>
+          </a:solidFill>
+          <a:ln w="10160">
+            <a:solidFill>
+              <a:srgbClr val="E1DACB"/>
+            </a:solidFill>
+          </a:ln>
+          <a:effectLst/>
+        </p:spPr>
+        <p:style>
+          <a:lnRef idx="1">
+            <a:schemeClr val="accent1"/>
+          </a:lnRef>
+          <a:fillRef idx="3">
+            <a:schemeClr val="accent1"/>
+          </a:fillRef>
+          <a:effectRef idx="2">
+            <a:schemeClr val="accent1"/>
+          </a:effectRef>
+          <a:fontRef idx="minor">
+            <a:schemeClr val="lt1"/>
+          </a:fontRef>
+        </p:style>
+        <p:txBody>
+          <a:bodyPr rtlCol="0" anchor="ctr"/>
+          <a:lstStyle/>
+          <a:p>
+            <a:pPr algn="ctr"/>
+          </a:p>
+        </p:txBody>
+      </p:sp>
+      <p:sp>
+        <p:nvSpPr>
+          <p:cNvPr id="15" name="TextBox 14"/>
+          <p:cNvSpPr txBox="1"/>
+          <p:nvPr/>
+        </p:nvSpPr>
+        <p:spPr>
+          <a:xfrm>
+            <a:off x="10268711" y="1828800"/>
+            <a:ext cx="1307592" cy="566928"/>
+          </a:xfrm>
+          <a:prstGeom prst="rect">
+            <a:avLst/>
+          </a:prstGeom>
+          <a:noFill/>
+        </p:spPr>
+        <p:txBody>
+          <a:bodyPr wrap="square" anchor="ctr">
+            <a:spAutoFit/>
+          </a:bodyPr>
+          <a:lstStyle/>
+          <a:p>
+            <a:pPr algn="ctr"/>
+            <a:r>
+              <a:rPr sz="1200" b="1" i="0">
+                <a:solidFill>
+                  <a:srgbClr val="FFFFFF"/>
+                </a:solidFill>
+                <a:latin typeface="Hiragino Sans"/>
+              </a:rPr>
+              <a:t>推奨</a:t>
+            </a:r>
+          </a:p>
+        </p:txBody>
+      </p:sp>
+      <p:sp>
+        <p:nvSpPr>
+          <p:cNvPr id="16" name="Rectangle 15"/>
+          <p:cNvSpPr/>
+          <p:nvPr/>
+        </p:nvSpPr>
+        <p:spPr>
+          <a:xfrm>
+            <a:off x="502920" y="2395728"/>
+            <a:ext cx="3749039" cy="566928"/>
           </a:xfrm>
           <a:prstGeom prst="rect">
             <a:avLst/>
@@ -11469,88 +11837,292 @@
       </p:sp>
       <p:sp>
         <p:nvSpPr>
-          <p:cNvPr id="12" name="TextBox 11"/>
-          <p:cNvSpPr txBox="1"/>
-          <p:nvPr/>
-        </p:nvSpPr>
-        <p:spPr>
-          <a:xfrm>
-            <a:off x="2194560" y="1920240"/>
-            <a:ext cx="4389120" cy="274320"/>
-          </a:xfrm>
-          <a:prstGeom prst="rect">
-            <a:avLst/>
-          </a:prstGeom>
-          <a:noFill/>
-        </p:spPr>
-        <p:txBody>
-          <a:bodyPr wrap="square" anchor="t">
+          <p:cNvPr id="17" name="TextBox 16"/>
+          <p:cNvSpPr txBox="1"/>
+          <p:nvPr/>
+        </p:nvSpPr>
+        <p:spPr>
+          <a:xfrm>
+            <a:off x="667512" y="2395728"/>
+            <a:ext cx="3474719" cy="566928"/>
+          </a:xfrm>
+          <a:prstGeom prst="rect">
+            <a:avLst/>
+          </a:prstGeom>
+          <a:noFill/>
+        </p:spPr>
+        <p:txBody>
+          <a:bodyPr wrap="square" anchor="ctr">
             <a:spAutoFit/>
           </a:bodyPr>
           <a:lstStyle/>
           <a:p>
             <a:pPr algn="l"/>
             <a:r>
-              <a:rPr sz="950" b="1" i="0">
-                <a:solidFill>
-                  <a:srgbClr val="AA2E26"/>
-                </a:solidFill>
-                <a:latin typeface="Hiragino Sans"/>
-              </a:rPr>
-              <a:t>人＝打席</a:t>
-            </a:r>
-          </a:p>
-        </p:txBody>
-      </p:sp>
-      <p:sp>
-        <p:nvSpPr>
-          <p:cNvPr id="13" name="TextBox 12"/>
-          <p:cNvSpPr txBox="1"/>
-          <p:nvPr/>
-        </p:nvSpPr>
-        <p:spPr>
-          <a:xfrm>
-            <a:off x="2194560" y="2194560"/>
-            <a:ext cx="4389120" cy="502920"/>
-          </a:xfrm>
-          <a:prstGeom prst="rect">
-            <a:avLst/>
-          </a:prstGeom>
-          <a:noFill/>
-        </p:spPr>
-        <p:txBody>
-          <a:bodyPr wrap="square" anchor="t">
-            <a:spAutoFit/>
-          </a:bodyPr>
-          <a:lstStyle/>
-          <a:p>
-            <a:pPr algn="l">
-              <a:lnSpc>
-                <a:spcPct val="105000"/>
-              </a:lnSpc>
-            </a:pPr>
-            <a:r>
-              <a:rPr sz="1200" b="0" i="0">
+              <a:rPr sz="1150" b="1" i="0">
                 <a:solidFill>
                   <a:srgbClr val="1A1A1A"/>
                 </a:solidFill>
                 <a:latin typeface="Hiragino Sans"/>
               </a:rPr>
-              <a:t>調査士(5-7聖域)→当日の打席を1つ決める</a:t>
-            </a:r>
-          </a:p>
-        </p:txBody>
-      </p:sp>
-      <p:sp>
-        <p:nvSpPr>
-          <p:cNvPr id="14" name="Rectangle 13"/>
+              <a:t>① Remote Control（本命）</a:t>
+            </a:r>
+          </a:p>
+        </p:txBody>
+      </p:sp>
+      <p:sp>
+        <p:nvSpPr>
+          <p:cNvPr id="18" name="Rectangle 17"/>
           <p:cNvSpPr/>
           <p:nvPr/>
         </p:nvSpPr>
         <p:spPr>
           <a:xfrm>
-            <a:off x="6858000" y="1828800"/>
-            <a:ext cx="4828032" cy="914400"/>
+            <a:off x="4251959" y="2395728"/>
+            <a:ext cx="2194560" cy="566928"/>
+          </a:xfrm>
+          <a:prstGeom prst="rect">
+            <a:avLst/>
+          </a:prstGeom>
+          <a:solidFill>
+            <a:srgbClr val="F1ECE1"/>
+          </a:solidFill>
+          <a:ln w="10160">
+            <a:solidFill>
+              <a:srgbClr val="E1DACB"/>
+            </a:solidFill>
+          </a:ln>
+          <a:effectLst/>
+        </p:spPr>
+        <p:style>
+          <a:lnRef idx="1">
+            <a:schemeClr val="accent1"/>
+          </a:lnRef>
+          <a:fillRef idx="3">
+            <a:schemeClr val="accent1"/>
+          </a:fillRef>
+          <a:effectRef idx="2">
+            <a:schemeClr val="accent1"/>
+          </a:effectRef>
+          <a:fontRef idx="minor">
+            <a:schemeClr val="lt1"/>
+          </a:fontRef>
+        </p:style>
+        <p:txBody>
+          <a:bodyPr rtlCol="0" anchor="ctr"/>
+          <a:lstStyle/>
+          <a:p>
+            <a:pPr algn="ctr"/>
+          </a:p>
+        </p:txBody>
+      </p:sp>
+      <p:sp>
+        <p:nvSpPr>
+          <p:cNvPr id="19" name="TextBox 18"/>
+          <p:cNvSpPr txBox="1"/>
+          <p:nvPr/>
+        </p:nvSpPr>
+        <p:spPr>
+          <a:xfrm>
+            <a:off x="4416551" y="2395728"/>
+            <a:ext cx="1920240" cy="566928"/>
+          </a:xfrm>
+          <a:prstGeom prst="rect">
+            <a:avLst/>
+          </a:prstGeom>
+          <a:noFill/>
+        </p:spPr>
+        <p:txBody>
+          <a:bodyPr wrap="square" anchor="ctr">
+            <a:spAutoFit/>
+          </a:bodyPr>
+          <a:lstStyle/>
+          <a:p>
+            <a:pPr algn="l"/>
+            <a:r>
+              <a:rPr sz="1150" b="0" i="0">
+                <a:solidFill>
+                  <a:srgbClr val="1A1A1A"/>
+                </a:solidFill>
+                <a:latin typeface="Hiragino Sans"/>
+              </a:rPr>
+              <a:t>低・5分</a:t>
+            </a:r>
+          </a:p>
+        </p:txBody>
+      </p:sp>
+      <p:sp>
+        <p:nvSpPr>
+          <p:cNvPr id="20" name="Rectangle 19"/>
+          <p:cNvSpPr/>
+          <p:nvPr/>
+        </p:nvSpPr>
+        <p:spPr>
+          <a:xfrm>
+            <a:off x="6446519" y="2395728"/>
+            <a:ext cx="3657600" cy="566928"/>
+          </a:xfrm>
+          <a:prstGeom prst="rect">
+            <a:avLst/>
+          </a:prstGeom>
+          <a:solidFill>
+            <a:srgbClr val="F1ECE1"/>
+          </a:solidFill>
+          <a:ln w="10160">
+            <a:solidFill>
+              <a:srgbClr val="E1DACB"/>
+            </a:solidFill>
+          </a:ln>
+          <a:effectLst/>
+        </p:spPr>
+        <p:style>
+          <a:lnRef idx="1">
+            <a:schemeClr val="accent1"/>
+          </a:lnRef>
+          <a:fillRef idx="3">
+            <a:schemeClr val="accent1"/>
+          </a:fillRef>
+          <a:effectRef idx="2">
+            <a:schemeClr val="accent1"/>
+          </a:effectRef>
+          <a:fontRef idx="minor">
+            <a:schemeClr val="lt1"/>
+          </a:fontRef>
+        </p:style>
+        <p:txBody>
+          <a:bodyPr rtlCol="0" anchor="ctr"/>
+          <a:lstStyle/>
+          <a:p>
+            <a:pPr algn="ctr"/>
+          </a:p>
+        </p:txBody>
+      </p:sp>
+      <p:sp>
+        <p:nvSpPr>
+          <p:cNvPr id="21" name="TextBox 20"/>
+          <p:cNvSpPr txBox="1"/>
+          <p:nvPr/>
+        </p:nvSpPr>
+        <p:spPr>
+          <a:xfrm>
+            <a:off x="6611111" y="2395728"/>
+            <a:ext cx="3383280" cy="566928"/>
+          </a:xfrm>
+          <a:prstGeom prst="rect">
+            <a:avLst/>
+          </a:prstGeom>
+          <a:noFill/>
+        </p:spPr>
+        <p:txBody>
+          <a:bodyPr wrap="square" anchor="ctr">
+            <a:spAutoFit/>
+          </a:bodyPr>
+          <a:lstStyle/>
+          <a:p>
+            <a:pPr algn="l"/>
+            <a:r>
+              <a:rPr sz="1150" b="0" i="0">
+                <a:solidFill>
+                  <a:srgbClr val="1A1A1A"/>
+                </a:solidFill>
+                <a:latin typeface="Hiragino Sans"/>
+              </a:rPr>
+              <a:t>アプリで快適。打席の合間に確認・指示</a:t>
+            </a:r>
+          </a:p>
+        </p:txBody>
+      </p:sp>
+      <p:sp>
+        <p:nvSpPr>
+          <p:cNvPr id="22" name="Rectangle 21"/>
+          <p:cNvSpPr/>
+          <p:nvPr/>
+        </p:nvSpPr>
+        <p:spPr>
+          <a:xfrm>
+            <a:off x="10104119" y="2395728"/>
+            <a:ext cx="1581912" cy="566928"/>
+          </a:xfrm>
+          <a:prstGeom prst="rect">
+            <a:avLst/>
+          </a:prstGeom>
+          <a:solidFill>
+            <a:srgbClr val="F4E4E2"/>
+          </a:solidFill>
+          <a:ln w="10160">
+            <a:solidFill>
+              <a:srgbClr val="E1DACB"/>
+            </a:solidFill>
+          </a:ln>
+          <a:effectLst/>
+        </p:spPr>
+        <p:style>
+          <a:lnRef idx="1">
+            <a:schemeClr val="accent1"/>
+          </a:lnRef>
+          <a:fillRef idx="3">
+            <a:schemeClr val="accent1"/>
+          </a:fillRef>
+          <a:effectRef idx="2">
+            <a:schemeClr val="accent1"/>
+          </a:effectRef>
+          <a:fontRef idx="minor">
+            <a:schemeClr val="lt1"/>
+          </a:fontRef>
+        </p:style>
+        <p:txBody>
+          <a:bodyPr rtlCol="0" anchor="ctr"/>
+          <a:lstStyle/>
+          <a:p>
+            <a:pPr algn="ctr"/>
+          </a:p>
+        </p:txBody>
+      </p:sp>
+      <p:sp>
+        <p:nvSpPr>
+          <p:cNvPr id="23" name="TextBox 22"/>
+          <p:cNvSpPr txBox="1"/>
+          <p:nvPr/>
+        </p:nvSpPr>
+        <p:spPr>
+          <a:xfrm>
+            <a:off x="10268711" y="2395728"/>
+            <a:ext cx="1307592" cy="566928"/>
+          </a:xfrm>
+          <a:prstGeom prst="rect">
+            <a:avLst/>
+          </a:prstGeom>
+          <a:noFill/>
+        </p:spPr>
+        <p:txBody>
+          <a:bodyPr wrap="square" anchor="ctr">
+            <a:spAutoFit/>
+          </a:bodyPr>
+          <a:lstStyle/>
+          <a:p>
+            <a:pPr algn="ctr"/>
+            <a:r>
+              <a:rPr sz="1150" b="1" i="0">
+                <a:solidFill>
+                  <a:srgbClr val="8C241D"/>
+                </a:solidFill>
+                <a:latin typeface="Hiragino Sans"/>
+              </a:rPr>
+              <a:t>★★★★★</a:t>
+            </a:r>
+          </a:p>
+        </p:txBody>
+      </p:sp>
+      <p:sp>
+        <p:nvSpPr>
+          <p:cNvPr id="24" name="Rectangle 23"/>
+          <p:cNvSpPr/>
+          <p:nvPr/>
+        </p:nvSpPr>
+        <p:spPr>
+          <a:xfrm>
+            <a:off x="502920" y="2962656"/>
+            <a:ext cx="3749039" cy="566928"/>
           </a:xfrm>
           <a:prstGeom prst="rect">
             <a:avLst/>
@@ -11589,97 +12161,60 @@
       </p:sp>
       <p:sp>
         <p:nvSpPr>
-          <p:cNvPr id="15" name="TextBox 14"/>
-          <p:cNvSpPr txBox="1"/>
-          <p:nvPr/>
-        </p:nvSpPr>
-        <p:spPr>
-          <a:xfrm>
-            <a:off x="7040880" y="1920240"/>
-            <a:ext cx="4480560" cy="274320"/>
-          </a:xfrm>
-          <a:prstGeom prst="rect">
-            <a:avLst/>
-          </a:prstGeom>
-          <a:noFill/>
-        </p:spPr>
-        <p:txBody>
-          <a:bodyPr wrap="square" anchor="t">
+          <p:cNvPr id="25" name="TextBox 24"/>
+          <p:cNvSpPr txBox="1"/>
+          <p:nvPr/>
+        </p:nvSpPr>
+        <p:spPr>
+          <a:xfrm>
+            <a:off x="667512" y="2962656"/>
+            <a:ext cx="3474719" cy="566928"/>
+          </a:xfrm>
+          <a:prstGeom prst="rect">
+            <a:avLst/>
+          </a:prstGeom>
+          <a:noFill/>
+        </p:spPr>
+        <p:txBody>
+          <a:bodyPr wrap="square" anchor="ctr">
             <a:spAutoFit/>
           </a:bodyPr>
           <a:lstStyle/>
           <a:p>
             <a:pPr algn="l"/>
             <a:r>
-              <a:rPr sz="950" b="1" i="0">
-                <a:solidFill>
-                  <a:srgbClr val="6E6E6E"/>
-                </a:solidFill>
-                <a:latin typeface="Hiragino Sans"/>
-              </a:rPr>
-              <a:t>旧Mac＝Claude代行</a:t>
-            </a:r>
-          </a:p>
-        </p:txBody>
-      </p:sp>
-      <p:sp>
-        <p:nvSpPr>
-          <p:cNvPr id="16" name="TextBox 15"/>
-          <p:cNvSpPr txBox="1"/>
-          <p:nvPr/>
-        </p:nvSpPr>
-        <p:spPr>
-          <a:xfrm>
-            <a:off x="7040880" y="2194560"/>
-            <a:ext cx="4480560" cy="502920"/>
-          </a:xfrm>
-          <a:prstGeom prst="rect">
-            <a:avLst/>
-          </a:prstGeom>
-          <a:noFill/>
-        </p:spPr>
-        <p:txBody>
-          <a:bodyPr wrap="square" anchor="t">
-            <a:spAutoFit/>
-          </a:bodyPr>
-          <a:lstStyle/>
-          <a:p>
-            <a:pPr algn="l">
-              <a:lnSpc>
-                <a:spcPct val="105000"/>
-              </a:lnSpc>
-            </a:pPr>
-            <a:r>
-              <a:rPr sz="1200" b="0" i="0">
+              <a:rPr sz="1150" b="1" i="0">
                 <a:solidFill>
                   <a:srgbClr val="1A1A1A"/>
                 </a:solidFill>
                 <a:latin typeface="Hiragino Sans"/>
               </a:rPr>
-              <a:t>旧Mac：朝ブリーフ自動（カネ直結2-3件＋今日の打席は誰か）</a:t>
-            </a:r>
-          </a:p>
-        </p:txBody>
-      </p:sp>
-      <p:sp>
-        <p:nvSpPr>
-          <p:cNvPr id="17" name="Rectangle 16"/>
+              <a:t>② SSH+Tailscale+Blink</a:t>
+            </a:r>
+          </a:p>
+        </p:txBody>
+      </p:sp>
+      <p:sp>
+        <p:nvSpPr>
+          <p:cNvPr id="26" name="Rectangle 25"/>
           <p:cNvSpPr/>
           <p:nvPr/>
         </p:nvSpPr>
         <p:spPr>
           <a:xfrm>
-            <a:off x="502920" y="2852928"/>
-            <a:ext cx="1371600" cy="914400"/>
+            <a:off x="4251959" y="2962656"/>
+            <a:ext cx="2194560" cy="566928"/>
           </a:xfrm>
           <a:prstGeom prst="rect">
             <a:avLst/>
           </a:prstGeom>
           <a:solidFill>
-            <a:srgbClr val="F4E4E2"/>
+            <a:srgbClr val="ECE8DF"/>
           </a:solidFill>
-          <a:ln>
-            <a:noFill/>
+          <a:ln w="10160">
+            <a:solidFill>
+              <a:srgbClr val="E1DACB"/>
+            </a:solidFill>
           </a:ln>
           <a:effectLst/>
         </p:spPr>
@@ -11707,23 +12242,60 @@
       </p:sp>
       <p:sp>
         <p:nvSpPr>
-          <p:cNvPr id="18" name="Rectangle 17"/>
+          <p:cNvPr id="27" name="TextBox 26"/>
+          <p:cNvSpPr txBox="1"/>
+          <p:nvPr/>
+        </p:nvSpPr>
+        <p:spPr>
+          <a:xfrm>
+            <a:off x="4416551" y="2962656"/>
+            <a:ext cx="1920240" cy="566928"/>
+          </a:xfrm>
+          <a:prstGeom prst="rect">
+            <a:avLst/>
+          </a:prstGeom>
+          <a:noFill/>
+        </p:spPr>
+        <p:txBody>
+          <a:bodyPr wrap="square" anchor="ctr">
+            <a:spAutoFit/>
+          </a:bodyPr>
+          <a:lstStyle/>
+          <a:p>
+            <a:pPr algn="l"/>
+            <a:r>
+              <a:rPr sz="1150" b="0" i="0">
+                <a:solidFill>
+                  <a:srgbClr val="1A1A1A"/>
+                </a:solidFill>
+                <a:latin typeface="Hiragino Sans"/>
+              </a:rPr>
+              <a:t>中・30分</a:t>
+            </a:r>
+          </a:p>
+        </p:txBody>
+      </p:sp>
+      <p:sp>
+        <p:nvSpPr>
+          <p:cNvPr id="28" name="Rectangle 27"/>
           <p:cNvSpPr/>
           <p:nvPr/>
         </p:nvSpPr>
         <p:spPr>
           <a:xfrm>
-            <a:off x="502920" y="2852928"/>
-            <a:ext cx="91440" cy="914400"/>
+            <a:off x="6446519" y="2962656"/>
+            <a:ext cx="3657600" cy="566928"/>
           </a:xfrm>
           <a:prstGeom prst="rect">
             <a:avLst/>
           </a:prstGeom>
           <a:solidFill>
-            <a:srgbClr val="AA2E26"/>
+            <a:srgbClr val="ECE8DF"/>
           </a:solidFill>
-          <a:ln>
-            <a:noFill/>
+          <a:ln w="10160">
+            <a:solidFill>
+              <a:srgbClr val="E1DACB"/>
+            </a:solidFill>
           </a:ln>
           <a:effectLst/>
         </p:spPr>
@@ -11751,14 +12323,14 @@
       </p:sp>
       <p:sp>
         <p:nvSpPr>
-          <p:cNvPr id="19" name="TextBox 18"/>
-          <p:cNvSpPr txBox="1"/>
-          <p:nvPr/>
-        </p:nvSpPr>
-        <p:spPr>
-          <a:xfrm>
-            <a:off x="502920" y="2852928"/>
-            <a:ext cx="1371600" cy="914400"/>
+          <p:cNvPr id="29" name="TextBox 28"/>
+          <p:cNvSpPr txBox="1"/>
+          <p:nvPr/>
+        </p:nvSpPr>
+        <p:spPr>
+          <a:xfrm>
+            <a:off x="6611111" y="2962656"/>
+            <a:ext cx="3383280" cy="566928"/>
           </a:xfrm>
           <a:prstGeom prst="rect">
             <a:avLst/>
@@ -11771,29 +12343,110 @@
           </a:bodyPr>
           <a:lstStyle/>
           <a:p>
+            <a:pPr algn="l"/>
+            <a:r>
+              <a:rPr sz="1150" b="0" i="0">
+                <a:solidFill>
+                  <a:srgbClr val="1A1A1A"/>
+                </a:solidFill>
+                <a:latin typeface="Hiragino Sans"/>
+              </a:rPr>
+              <a:t>ターミナル常駐。画面は小さい</a:t>
+            </a:r>
+          </a:p>
+        </p:txBody>
+      </p:sp>
+      <p:sp>
+        <p:nvSpPr>
+          <p:cNvPr id="30" name="Rectangle 29"/>
+          <p:cNvSpPr/>
+          <p:nvPr/>
+        </p:nvSpPr>
+        <p:spPr>
+          <a:xfrm>
+            <a:off x="10104119" y="2962656"/>
+            <a:ext cx="1581912" cy="566928"/>
+          </a:xfrm>
+          <a:prstGeom prst="rect">
+            <a:avLst/>
+          </a:prstGeom>
+          <a:solidFill>
+            <a:srgbClr val="F4E4E2"/>
+          </a:solidFill>
+          <a:ln w="10160">
+            <a:solidFill>
+              <a:srgbClr val="E1DACB"/>
+            </a:solidFill>
+          </a:ln>
+          <a:effectLst/>
+        </p:spPr>
+        <p:style>
+          <a:lnRef idx="1">
+            <a:schemeClr val="accent1"/>
+          </a:lnRef>
+          <a:fillRef idx="3">
+            <a:schemeClr val="accent1"/>
+          </a:fillRef>
+          <a:effectRef idx="2">
+            <a:schemeClr val="accent1"/>
+          </a:effectRef>
+          <a:fontRef idx="minor">
+            <a:schemeClr val="lt1"/>
+          </a:fontRef>
+        </p:style>
+        <p:txBody>
+          <a:bodyPr rtlCol="0" anchor="ctr"/>
+          <a:lstStyle/>
+          <a:p>
             <a:pPr algn="ctr"/>
-            <a:r>
-              <a:rPr sz="1700" b="1" i="0">
+          </a:p>
+        </p:txBody>
+      </p:sp>
+      <p:sp>
+        <p:nvSpPr>
+          <p:cNvPr id="31" name="TextBox 30"/>
+          <p:cNvSpPr txBox="1"/>
+          <p:nvPr/>
+        </p:nvSpPr>
+        <p:spPr>
+          <a:xfrm>
+            <a:off x="10268711" y="2962656"/>
+            <a:ext cx="1307592" cy="566928"/>
+          </a:xfrm>
+          <a:prstGeom prst="rect">
+            <a:avLst/>
+          </a:prstGeom>
+          <a:noFill/>
+        </p:spPr>
+        <p:txBody>
+          <a:bodyPr wrap="square" anchor="ctr">
+            <a:spAutoFit/>
+          </a:bodyPr>
+          <a:lstStyle/>
+          <a:p>
+            <a:pPr algn="ctr"/>
+            <a:r>
+              <a:rPr sz="1150" b="1" i="0">
                 <a:solidFill>
                   <a:srgbClr val="8C241D"/>
                 </a:solidFill>
                 <a:latin typeface="Hiragino Sans"/>
               </a:rPr>
-              <a:t>日中</a:t>
-            </a:r>
-          </a:p>
-        </p:txBody>
-      </p:sp>
-      <p:sp>
-        <p:nvSpPr>
-          <p:cNvPr id="20" name="Rectangle 19"/>
+              <a:t>★★★★</a:t>
+            </a:r>
+          </a:p>
+        </p:txBody>
+      </p:sp>
+      <p:sp>
+        <p:nvSpPr>
+          <p:cNvPr id="32" name="Rectangle 31"/>
           <p:cNvSpPr/>
           <p:nvPr/>
         </p:nvSpPr>
         <p:spPr>
           <a:xfrm>
-            <a:off x="2011680" y="2852928"/>
-            <a:ext cx="4709160" cy="914400"/>
+            <a:off x="502920" y="3529584"/>
+            <a:ext cx="3749039" cy="566928"/>
           </a:xfrm>
           <a:prstGeom prst="rect">
             <a:avLst/>
@@ -11832,13 +12485,956 @@
       </p:sp>
       <p:sp>
         <p:nvSpPr>
-          <p:cNvPr id="21" name="TextBox 20"/>
-          <p:cNvSpPr txBox="1"/>
-          <p:nvPr/>
-        </p:nvSpPr>
-        <p:spPr>
-          <a:xfrm>
-            <a:off x="2194560" y="2944368"/>
+          <p:cNvPr id="33" name="TextBox 32"/>
+          <p:cNvSpPr txBox="1"/>
+          <p:nvPr/>
+        </p:nvSpPr>
+        <p:spPr>
+          <a:xfrm>
+            <a:off x="667512" y="3529584"/>
+            <a:ext cx="3474719" cy="566928"/>
+          </a:xfrm>
+          <a:prstGeom prst="rect">
+            <a:avLst/>
+          </a:prstGeom>
+          <a:noFill/>
+        </p:spPr>
+        <p:txBody>
+          <a:bodyPr wrap="square" anchor="ctr">
+            <a:spAutoFit/>
+          </a:bodyPr>
+          <a:lstStyle/>
+          <a:p>
+            <a:pPr algn="l"/>
+            <a:r>
+              <a:rPr sz="1150" b="1" i="0">
+                <a:solidFill>
+                  <a:srgbClr val="1A1A1A"/>
+                </a:solidFill>
+                <a:latin typeface="Hiragino Sans"/>
+              </a:rPr>
+              <a:t>③ リモートデスク(Jump等)</a:t>
+            </a:r>
+          </a:p>
+        </p:txBody>
+      </p:sp>
+      <p:sp>
+        <p:nvSpPr>
+          <p:cNvPr id="34" name="Rectangle 33"/>
+          <p:cNvSpPr/>
+          <p:nvPr/>
+        </p:nvSpPr>
+        <p:spPr>
+          <a:xfrm>
+            <a:off x="4251959" y="3529584"/>
+            <a:ext cx="2194560" cy="566928"/>
+          </a:xfrm>
+          <a:prstGeom prst="rect">
+            <a:avLst/>
+          </a:prstGeom>
+          <a:solidFill>
+            <a:srgbClr val="F1ECE1"/>
+          </a:solidFill>
+          <a:ln w="10160">
+            <a:solidFill>
+              <a:srgbClr val="E1DACB"/>
+            </a:solidFill>
+          </a:ln>
+          <a:effectLst/>
+        </p:spPr>
+        <p:style>
+          <a:lnRef idx="1">
+            <a:schemeClr val="accent1"/>
+          </a:lnRef>
+          <a:fillRef idx="3">
+            <a:schemeClr val="accent1"/>
+          </a:fillRef>
+          <a:effectRef idx="2">
+            <a:schemeClr val="accent1"/>
+          </a:effectRef>
+          <a:fontRef idx="minor">
+            <a:schemeClr val="lt1"/>
+          </a:fontRef>
+        </p:style>
+        <p:txBody>
+          <a:bodyPr rtlCol="0" anchor="ctr"/>
+          <a:lstStyle/>
+          <a:p>
+            <a:pPr algn="ctr"/>
+          </a:p>
+        </p:txBody>
+      </p:sp>
+      <p:sp>
+        <p:nvSpPr>
+          <p:cNvPr id="35" name="TextBox 34"/>
+          <p:cNvSpPr txBox="1"/>
+          <p:nvPr/>
+        </p:nvSpPr>
+        <p:spPr>
+          <a:xfrm>
+            <a:off x="4416551" y="3529584"/>
+            <a:ext cx="1920240" cy="566928"/>
+          </a:xfrm>
+          <a:prstGeom prst="rect">
+            <a:avLst/>
+          </a:prstGeom>
+          <a:noFill/>
+        </p:spPr>
+        <p:txBody>
+          <a:bodyPr wrap="square" anchor="ctr">
+            <a:spAutoFit/>
+          </a:bodyPr>
+          <a:lstStyle/>
+          <a:p>
+            <a:pPr algn="l"/>
+            <a:r>
+              <a:rPr sz="1150" b="0" i="0">
+                <a:solidFill>
+                  <a:srgbClr val="1A1A1A"/>
+                </a:solidFill>
+                <a:latin typeface="Hiragino Sans"/>
+              </a:rPr>
+              <a:t>低</a:t>
+            </a:r>
+          </a:p>
+        </p:txBody>
+      </p:sp>
+      <p:sp>
+        <p:nvSpPr>
+          <p:cNvPr id="36" name="Rectangle 35"/>
+          <p:cNvSpPr/>
+          <p:nvPr/>
+        </p:nvSpPr>
+        <p:spPr>
+          <a:xfrm>
+            <a:off x="6446519" y="3529584"/>
+            <a:ext cx="3657600" cy="566928"/>
+          </a:xfrm>
+          <a:prstGeom prst="rect">
+            <a:avLst/>
+          </a:prstGeom>
+          <a:solidFill>
+            <a:srgbClr val="F1ECE1"/>
+          </a:solidFill>
+          <a:ln w="10160">
+            <a:solidFill>
+              <a:srgbClr val="E1DACB"/>
+            </a:solidFill>
+          </a:ln>
+          <a:effectLst/>
+        </p:spPr>
+        <p:style>
+          <a:lnRef idx="1">
+            <a:schemeClr val="accent1"/>
+          </a:lnRef>
+          <a:fillRef idx="3">
+            <a:schemeClr val="accent1"/>
+          </a:fillRef>
+          <a:effectRef idx="2">
+            <a:schemeClr val="accent1"/>
+          </a:effectRef>
+          <a:fontRef idx="minor">
+            <a:schemeClr val="lt1"/>
+          </a:fontRef>
+        </p:style>
+        <p:txBody>
+          <a:bodyPr rtlCol="0" anchor="ctr"/>
+          <a:lstStyle/>
+          <a:p>
+            <a:pPr algn="ctr"/>
+          </a:p>
+        </p:txBody>
+      </p:sp>
+      <p:sp>
+        <p:nvSpPr>
+          <p:cNvPr id="37" name="TextBox 36"/>
+          <p:cNvSpPr txBox="1"/>
+          <p:nvPr/>
+        </p:nvSpPr>
+        <p:spPr>
+          <a:xfrm>
+            <a:off x="6611111" y="3529584"/>
+            <a:ext cx="3383280" cy="566928"/>
+          </a:xfrm>
+          <a:prstGeom prst="rect">
+            <a:avLst/>
+          </a:prstGeom>
+          <a:noFill/>
+        </p:spPr>
+        <p:txBody>
+          <a:bodyPr wrap="square" anchor="ctr">
+            <a:spAutoFit/>
+          </a:bodyPr>
+          <a:lstStyle/>
+          <a:p>
+            <a:pPr algn="l"/>
+            <a:r>
+              <a:rPr sz="1150" b="0" i="0">
+                <a:solidFill>
+                  <a:srgbClr val="1A1A1A"/>
+                </a:solidFill>
+                <a:latin typeface="Hiragino Sans"/>
+              </a:rPr>
+              <a:t>Mac画面ごと操作。遅く見づらい</a:t>
+            </a:r>
+          </a:p>
+        </p:txBody>
+      </p:sp>
+      <p:sp>
+        <p:nvSpPr>
+          <p:cNvPr id="38" name="Rectangle 37"/>
+          <p:cNvSpPr/>
+          <p:nvPr/>
+        </p:nvSpPr>
+        <p:spPr>
+          <a:xfrm>
+            <a:off x="10104119" y="3529584"/>
+            <a:ext cx="1581912" cy="566928"/>
+          </a:xfrm>
+          <a:prstGeom prst="rect">
+            <a:avLst/>
+          </a:prstGeom>
+          <a:solidFill>
+            <a:srgbClr val="F4E4E2"/>
+          </a:solidFill>
+          <a:ln w="10160">
+            <a:solidFill>
+              <a:srgbClr val="E1DACB"/>
+            </a:solidFill>
+          </a:ln>
+          <a:effectLst/>
+        </p:spPr>
+        <p:style>
+          <a:lnRef idx="1">
+            <a:schemeClr val="accent1"/>
+          </a:lnRef>
+          <a:fillRef idx="3">
+            <a:schemeClr val="accent1"/>
+          </a:fillRef>
+          <a:effectRef idx="2">
+            <a:schemeClr val="accent1"/>
+          </a:effectRef>
+          <a:fontRef idx="minor">
+            <a:schemeClr val="lt1"/>
+          </a:fontRef>
+        </p:style>
+        <p:txBody>
+          <a:bodyPr rtlCol="0" anchor="ctr"/>
+          <a:lstStyle/>
+          <a:p>
+            <a:pPr algn="ctr"/>
+          </a:p>
+        </p:txBody>
+      </p:sp>
+      <p:sp>
+        <p:nvSpPr>
+          <p:cNvPr id="39" name="TextBox 38"/>
+          <p:cNvSpPr txBox="1"/>
+          <p:nvPr/>
+        </p:nvSpPr>
+        <p:spPr>
+          <a:xfrm>
+            <a:off x="10268711" y="3529584"/>
+            <a:ext cx="1307592" cy="566928"/>
+          </a:xfrm>
+          <a:prstGeom prst="rect">
+            <a:avLst/>
+          </a:prstGeom>
+          <a:noFill/>
+        </p:spPr>
+        <p:txBody>
+          <a:bodyPr wrap="square" anchor="ctr">
+            <a:spAutoFit/>
+          </a:bodyPr>
+          <a:lstStyle/>
+          <a:p>
+            <a:pPr algn="ctr"/>
+            <a:r>
+              <a:rPr sz="1150" b="1" i="0">
+                <a:solidFill>
+                  <a:srgbClr val="8C241D"/>
+                </a:solidFill>
+                <a:latin typeface="Hiragino Sans"/>
+              </a:rPr>
+              <a:t>★★★</a:t>
+            </a:r>
+          </a:p>
+        </p:txBody>
+      </p:sp>
+      <p:sp>
+        <p:nvSpPr>
+          <p:cNvPr id="40" name="Rectangle 39"/>
+          <p:cNvSpPr/>
+          <p:nvPr/>
+        </p:nvSpPr>
+        <p:spPr>
+          <a:xfrm>
+            <a:off x="502920" y="4370832"/>
+            <a:ext cx="11183112" cy="1874519"/>
+          </a:xfrm>
+          <a:prstGeom prst="rect">
+            <a:avLst/>
+          </a:prstGeom>
+          <a:solidFill>
+            <a:srgbClr val="F1ECE1"/>
+          </a:solidFill>
+          <a:ln w="12700">
+            <a:solidFill>
+              <a:srgbClr val="E1DACB"/>
+            </a:solidFill>
+          </a:ln>
+          <a:effectLst/>
+        </p:spPr>
+        <p:style>
+          <a:lnRef idx="1">
+            <a:schemeClr val="accent1"/>
+          </a:lnRef>
+          <a:fillRef idx="3">
+            <a:schemeClr val="accent1"/>
+          </a:fillRef>
+          <a:effectRef idx="2">
+            <a:schemeClr val="accent1"/>
+          </a:effectRef>
+          <a:fontRef idx="minor">
+            <a:schemeClr val="lt1"/>
+          </a:fontRef>
+        </p:style>
+        <p:txBody>
+          <a:bodyPr rtlCol="0" anchor="ctr"/>
+          <a:lstStyle/>
+          <a:p>
+            <a:pPr algn="ctr"/>
+          </a:p>
+        </p:txBody>
+      </p:sp>
+      <p:sp>
+        <p:nvSpPr>
+          <p:cNvPr id="41" name="Rectangle 40"/>
+          <p:cNvSpPr/>
+          <p:nvPr/>
+        </p:nvSpPr>
+        <p:spPr>
+          <a:xfrm>
+            <a:off x="502920" y="4370832"/>
+            <a:ext cx="11183112" cy="54864"/>
+          </a:xfrm>
+          <a:prstGeom prst="rect">
+            <a:avLst/>
+          </a:prstGeom>
+          <a:solidFill>
+            <a:srgbClr val="AA2E26"/>
+          </a:solidFill>
+          <a:ln>
+            <a:noFill/>
+          </a:ln>
+          <a:effectLst/>
+        </p:spPr>
+        <p:style>
+          <a:lnRef idx="1">
+            <a:schemeClr val="accent1"/>
+          </a:lnRef>
+          <a:fillRef idx="3">
+            <a:schemeClr val="accent1"/>
+          </a:fillRef>
+          <a:effectRef idx="2">
+            <a:schemeClr val="accent1"/>
+          </a:effectRef>
+          <a:fontRef idx="minor">
+            <a:schemeClr val="lt1"/>
+          </a:fontRef>
+        </p:style>
+        <p:txBody>
+          <a:bodyPr rtlCol="0" anchor="ctr"/>
+          <a:lstStyle/>
+          <a:p>
+            <a:pPr algn="ctr"/>
+          </a:p>
+        </p:txBody>
+      </p:sp>
+      <p:sp>
+        <p:nvSpPr>
+          <p:cNvPr id="42" name="TextBox 41"/>
+          <p:cNvSpPr txBox="1"/>
+          <p:nvPr/>
+        </p:nvSpPr>
+        <p:spPr>
+          <a:xfrm>
+            <a:off x="758952" y="4517136"/>
+            <a:ext cx="10725912" cy="411480"/>
+          </a:xfrm>
+          <a:prstGeom prst="rect">
+            <a:avLst/>
+          </a:prstGeom>
+          <a:noFill/>
+        </p:spPr>
+        <p:txBody>
+          <a:bodyPr wrap="square" anchor="t">
+            <a:spAutoFit/>
+          </a:bodyPr>
+          <a:lstStyle/>
+          <a:p>
+            <a:pPr algn="l"/>
+            <a:r>
+              <a:rPr sz="1500" b="1" i="0">
+                <a:solidFill>
+                  <a:srgbClr val="AA2E26"/>
+                </a:solidFill>
+                <a:latin typeface="Hiragino Sans"/>
+              </a:rPr>
+              <a:t>🔐 セキュリティ（人に勧める時の心得）</a:t>
+            </a:r>
+          </a:p>
+        </p:txBody>
+      </p:sp>
+      <p:sp>
+        <p:nvSpPr>
+          <p:cNvPr id="43" name="TextBox 42"/>
+          <p:cNvSpPr txBox="1"/>
+          <p:nvPr/>
+        </p:nvSpPr>
+        <p:spPr>
+          <a:xfrm>
+            <a:off x="777240" y="5084064"/>
+            <a:ext cx="10634472" cy="420624"/>
+          </a:xfrm>
+          <a:prstGeom prst="rect">
+            <a:avLst/>
+          </a:prstGeom>
+          <a:noFill/>
+        </p:spPr>
+        <p:txBody>
+          <a:bodyPr wrap="square" anchor="t">
+            <a:spAutoFit/>
+          </a:bodyPr>
+          <a:lstStyle/>
+          <a:p>
+            <a:pPr algn="l">
+              <a:lnSpc>
+                <a:spcPct val="112000"/>
+              </a:lnSpc>
+            </a:pPr>
+            <a:r>
+              <a:rPr sz="1150" b="0" i="0">
+                <a:solidFill>
+                  <a:srgbClr val="1A1A1A"/>
+                </a:solidFill>
+                <a:latin typeface="Hiragino Sans"/>
+              </a:rPr>
+              <a:t>Remote Control＝コードは自宅Mac上で実行・通信はTLS・ポート開放不要（受け身で安全）。iPhoneを失くしたらアカウント側でデバイス登録を取消せば即遮断。</a:t>
+            </a:r>
+          </a:p>
+        </p:txBody>
+      </p:sp>
+      <p:sp>
+        <p:nvSpPr>
+          <p:cNvPr id="44" name="TextBox 43"/>
+          <p:cNvSpPr txBox="1"/>
+          <p:nvPr/>
+        </p:nvSpPr>
+        <p:spPr>
+          <a:xfrm>
+            <a:off x="777240" y="5504688"/>
+            <a:ext cx="10634472" cy="420624"/>
+          </a:xfrm>
+          <a:prstGeom prst="rect">
+            <a:avLst/>
+          </a:prstGeom>
+          <a:noFill/>
+        </p:spPr>
+        <p:txBody>
+          <a:bodyPr wrap="square" anchor="t">
+            <a:spAutoFit/>
+          </a:bodyPr>
+          <a:lstStyle/>
+          <a:p>
+            <a:pPr algn="l">
+              <a:lnSpc>
+                <a:spcPct val="112000"/>
+              </a:lnSpc>
+            </a:pPr>
+            <a:r>
+              <a:rPr sz="1150" b="0" i="0">
+                <a:solidFill>
+                  <a:srgbClr val="6E6E6E"/>
+                </a:solidFill>
+                <a:latin typeface="Hiragino Sans"/>
+              </a:rPr>
+              <a:t>SSH方式を使うなら必ず Tailscale等の閉域網＋鍵認証。SSHを直接インターネットに開けない。</a:t>
+            </a:r>
+          </a:p>
+        </p:txBody>
+      </p:sp>
+      <p:sp>
+        <p:nvSpPr>
+          <p:cNvPr id="45" name="TextBox 44"/>
+          <p:cNvSpPr txBox="1"/>
+          <p:nvPr/>
+        </p:nvSpPr>
+        <p:spPr>
+          <a:xfrm>
+            <a:off x="777240" y="5925312"/>
+            <a:ext cx="10634472" cy="420624"/>
+          </a:xfrm>
+          <a:prstGeom prst="rect">
+            <a:avLst/>
+          </a:prstGeom>
+          <a:noFill/>
+        </p:spPr>
+        <p:txBody>
+          <a:bodyPr wrap="square" anchor="t">
+            <a:spAutoFit/>
+          </a:bodyPr>
+          <a:lstStyle/>
+          <a:p>
+            <a:pPr algn="l">
+              <a:lnSpc>
+                <a:spcPct val="112000"/>
+              </a:lnSpc>
+            </a:pPr>
+            <a:r>
+              <a:rPr sz="1150" b="0" i="0">
+                <a:solidFill>
+                  <a:srgbClr val="8C241D"/>
+                </a:solidFill>
+                <a:latin typeface="Hiragino Sans"/>
+              </a:rPr>
+              <a:t>⚠️ ゆーしMac＝第三者(ゆーし)の実機に菊池のGoogle/Claude/顧客・財務・家族データがclone＆ログイン済。フルアクセス共有を許容するか、用途限定(別アカウント)にするかは意識的に決める。</a:t>
+            </a:r>
+          </a:p>
+        </p:txBody>
+      </p:sp>
+    </p:spTree>
+  </p:cSld>
+  <p:clrMapOvr>
+    <a:masterClrMapping/>
+  </p:clrMapOvr>
+</p:sld>
+</file>
+
+<file path=ppt/slides/slide8.xml><?xml version="1.0" encoding="utf-8"?>
+<p:sld xmlns:a="http://schemas.openxmlformats.org/drawingml/2006/main" xmlns:p="http://schemas.openxmlformats.org/presentationml/2006/main" xmlns:r="http://schemas.openxmlformats.org/officeDocument/2006/relationships">
+  <p:cSld>
+    <p:bg>
+      <p:bgPr>
+        <a:solidFill>
+          <a:srgbClr val="F9F6EF"/>
+        </a:solidFill>
+        <a:effectLst/>
+      </p:bgPr>
+    </p:bg>
+    <p:spTree>
+      <p:nvGrpSpPr>
+        <p:cNvPr id="1" name=""/>
+        <p:cNvGrpSpPr/>
+        <p:nvPr/>
+      </p:nvGrpSpPr>
+      <p:grpSpPr/>
+      <p:sp>
+        <p:nvSpPr>
+          <p:cNvPr id="2" name="Rectangle 1"/>
+          <p:cNvSpPr/>
+          <p:nvPr/>
+        </p:nvSpPr>
+        <p:spPr>
+          <a:xfrm>
+            <a:off x="457200" y="6400800"/>
+            <a:ext cx="11274552" cy="15240"/>
+          </a:xfrm>
+          <a:prstGeom prst="rect">
+            <a:avLst/>
+          </a:prstGeom>
+          <a:solidFill>
+            <a:srgbClr val="DAD6CF"/>
+          </a:solidFill>
+          <a:ln>
+            <a:noFill/>
+          </a:ln>
+          <a:effectLst/>
+        </p:spPr>
+        <p:style>
+          <a:lnRef idx="1">
+            <a:schemeClr val="accent1"/>
+          </a:lnRef>
+          <a:fillRef idx="3">
+            <a:schemeClr val="accent1"/>
+          </a:fillRef>
+          <a:effectRef idx="2">
+            <a:schemeClr val="accent1"/>
+          </a:effectRef>
+          <a:fontRef idx="minor">
+            <a:schemeClr val="lt1"/>
+          </a:fontRef>
+        </p:style>
+        <p:txBody>
+          <a:bodyPr rtlCol="0" anchor="ctr"/>
+          <a:lstStyle/>
+          <a:p>
+            <a:pPr algn="ctr"/>
+          </a:p>
+        </p:txBody>
+      </p:sp>
+      <p:sp>
+        <p:nvSpPr>
+          <p:cNvPr id="3" name="TextBox 2"/>
+          <p:cNvSpPr txBox="1"/>
+          <p:nvPr/>
+        </p:nvSpPr>
+        <p:spPr>
+          <a:xfrm>
+            <a:off x="457200" y="6473952"/>
+            <a:ext cx="10058400" cy="292608"/>
+          </a:xfrm>
+          <a:prstGeom prst="rect">
+            <a:avLst/>
+          </a:prstGeom>
+          <a:noFill/>
+        </p:spPr>
+        <p:txBody>
+          <a:bodyPr wrap="square" anchor="t">
+            <a:spAutoFit/>
+          </a:bodyPr>
+          <a:lstStyle/>
+          <a:p>
+            <a:pPr algn="l"/>
+            <a:r>
+              <a:rPr sz="900" b="0" i="0">
+                <a:solidFill>
+                  <a:srgbClr val="6E6E6E"/>
+                </a:solidFill>
+                <a:latin typeface="Hiragino Sans"/>
+              </a:rPr>
+              <a:t>KHD オペレーティングモデル × Mac3台・リモート活用  ｜  菊池 研太  ｜  2026-06-28</a:t>
+            </a:r>
+          </a:p>
+        </p:txBody>
+      </p:sp>
+      <p:sp>
+        <p:nvSpPr>
+          <p:cNvPr id="4" name="TextBox 3"/>
+          <p:cNvSpPr txBox="1"/>
+          <p:nvPr/>
+        </p:nvSpPr>
+        <p:spPr>
+          <a:xfrm>
+            <a:off x="548640" y="365760"/>
+            <a:ext cx="10972800" cy="365760"/>
+          </a:xfrm>
+          <a:prstGeom prst="rect">
+            <a:avLst/>
+          </a:prstGeom>
+          <a:noFill/>
+        </p:spPr>
+        <p:txBody>
+          <a:bodyPr wrap="square" anchor="t">
+            <a:spAutoFit/>
+          </a:bodyPr>
+          <a:lstStyle/>
+          <a:p>
+            <a:pPr algn="l"/>
+            <a:r>
+              <a:rPr sz="1300" b="1" i="0">
+                <a:solidFill>
+                  <a:srgbClr val="AA2E26"/>
+                </a:solidFill>
+                <a:latin typeface="Hiragino Sans"/>
+              </a:rPr>
+              <a:t>DAILY FLOW</a:t>
+            </a:r>
+          </a:p>
+        </p:txBody>
+      </p:sp>
+      <p:sp>
+        <p:nvSpPr>
+          <p:cNvPr id="5" name="Rectangle 4"/>
+          <p:cNvSpPr/>
+          <p:nvPr/>
+        </p:nvSpPr>
+        <p:spPr>
+          <a:xfrm>
+            <a:off x="566928" y="713232"/>
+            <a:ext cx="1554480" cy="38100"/>
+          </a:xfrm>
+          <a:prstGeom prst="rect">
+            <a:avLst/>
+          </a:prstGeom>
+          <a:solidFill>
+            <a:srgbClr val="AA2E26"/>
+          </a:solidFill>
+          <a:ln>
+            <a:noFill/>
+          </a:ln>
+          <a:effectLst/>
+        </p:spPr>
+        <p:style>
+          <a:lnRef idx="1">
+            <a:schemeClr val="accent1"/>
+          </a:lnRef>
+          <a:fillRef idx="3">
+            <a:schemeClr val="accent1"/>
+          </a:fillRef>
+          <a:effectRef idx="2">
+            <a:schemeClr val="accent1"/>
+          </a:effectRef>
+          <a:fontRef idx="minor">
+            <a:schemeClr val="lt1"/>
+          </a:fontRef>
+        </p:style>
+        <p:txBody>
+          <a:bodyPr rtlCol="0" anchor="ctr"/>
+          <a:lstStyle/>
+          <a:p>
+            <a:pPr algn="ctr"/>
+          </a:p>
+        </p:txBody>
+      </p:sp>
+      <p:sp>
+        <p:nvSpPr>
+          <p:cNvPr id="6" name="TextBox 5"/>
+          <p:cNvSpPr txBox="1"/>
+          <p:nvPr/>
+        </p:nvSpPr>
+        <p:spPr>
+          <a:xfrm>
+            <a:off x="548640" y="822960"/>
+            <a:ext cx="11064240" cy="502920"/>
+          </a:xfrm>
+          <a:prstGeom prst="rect">
+            <a:avLst/>
+          </a:prstGeom>
+          <a:noFill/>
+        </p:spPr>
+        <p:txBody>
+          <a:bodyPr wrap="square" anchor="t">
+            <a:spAutoFit/>
+          </a:bodyPr>
+          <a:lstStyle/>
+          <a:p>
+            <a:pPr algn="l"/>
+            <a:r>
+              <a:rPr sz="2300" b="1" i="0">
+                <a:solidFill>
+                  <a:srgbClr val="1A1A1A"/>
+                </a:solidFill>
+                <a:latin typeface="Hiragino Sans"/>
+              </a:rPr>
+              <a:t>1日の流れ ── 朝の聖域は守り、打席に集中</a:t>
+            </a:r>
+          </a:p>
+        </p:txBody>
+      </p:sp>
+      <p:sp>
+        <p:nvSpPr>
+          <p:cNvPr id="7" name="TextBox 6"/>
+          <p:cNvSpPr txBox="1"/>
+          <p:nvPr/>
+        </p:nvSpPr>
+        <p:spPr>
+          <a:xfrm>
+            <a:off x="566928" y="1316736"/>
+            <a:ext cx="11064240" cy="274320"/>
+          </a:xfrm>
+          <a:prstGeom prst="rect">
+            <a:avLst/>
+          </a:prstGeom>
+          <a:noFill/>
+        </p:spPr>
+        <p:txBody>
+          <a:bodyPr wrap="square" anchor="t">
+            <a:spAutoFit/>
+          </a:bodyPr>
+          <a:lstStyle/>
+          <a:p>
+            <a:pPr algn="l"/>
+            <a:r>
+              <a:rPr sz="1150" b="0" i="0">
+                <a:solidFill>
+                  <a:srgbClr val="6E6E6E"/>
+                </a:solidFill>
+                <a:latin typeface="Hiragino Sans"/>
+              </a:rPr>
+              <a:t>旧Macは裏で回り続ける。第一声は「今日の打席は誰？」</a:t>
+            </a:r>
+          </a:p>
+        </p:txBody>
+      </p:sp>
+      <p:sp>
+        <p:nvSpPr>
+          <p:cNvPr id="8" name="Rectangle 7"/>
+          <p:cNvSpPr/>
+          <p:nvPr/>
+        </p:nvSpPr>
+        <p:spPr>
+          <a:xfrm>
+            <a:off x="502920" y="1828800"/>
+            <a:ext cx="1371600" cy="914400"/>
+          </a:xfrm>
+          <a:prstGeom prst="rect">
+            <a:avLst/>
+          </a:prstGeom>
+          <a:solidFill>
+            <a:srgbClr val="F4E4E2"/>
+          </a:solidFill>
+          <a:ln>
+            <a:noFill/>
+          </a:ln>
+          <a:effectLst/>
+        </p:spPr>
+        <p:style>
+          <a:lnRef idx="1">
+            <a:schemeClr val="accent1"/>
+          </a:lnRef>
+          <a:fillRef idx="3">
+            <a:schemeClr val="accent1"/>
+          </a:fillRef>
+          <a:effectRef idx="2">
+            <a:schemeClr val="accent1"/>
+          </a:effectRef>
+          <a:fontRef idx="minor">
+            <a:schemeClr val="lt1"/>
+          </a:fontRef>
+        </p:style>
+        <p:txBody>
+          <a:bodyPr rtlCol="0" anchor="ctr"/>
+          <a:lstStyle/>
+          <a:p>
+            <a:pPr algn="ctr"/>
+          </a:p>
+        </p:txBody>
+      </p:sp>
+      <p:sp>
+        <p:nvSpPr>
+          <p:cNvPr id="9" name="Rectangle 8"/>
+          <p:cNvSpPr/>
+          <p:nvPr/>
+        </p:nvSpPr>
+        <p:spPr>
+          <a:xfrm>
+            <a:off x="502920" y="1828800"/>
+            <a:ext cx="91440" cy="914400"/>
+          </a:xfrm>
+          <a:prstGeom prst="rect">
+            <a:avLst/>
+          </a:prstGeom>
+          <a:solidFill>
+            <a:srgbClr val="AA2E26"/>
+          </a:solidFill>
+          <a:ln>
+            <a:noFill/>
+          </a:ln>
+          <a:effectLst/>
+        </p:spPr>
+        <p:style>
+          <a:lnRef idx="1">
+            <a:schemeClr val="accent1"/>
+          </a:lnRef>
+          <a:fillRef idx="3">
+            <a:schemeClr val="accent1"/>
+          </a:fillRef>
+          <a:effectRef idx="2">
+            <a:schemeClr val="accent1"/>
+          </a:effectRef>
+          <a:fontRef idx="minor">
+            <a:schemeClr val="lt1"/>
+          </a:fontRef>
+        </p:style>
+        <p:txBody>
+          <a:bodyPr rtlCol="0" anchor="ctr"/>
+          <a:lstStyle/>
+          <a:p>
+            <a:pPr algn="ctr"/>
+          </a:p>
+        </p:txBody>
+      </p:sp>
+      <p:sp>
+        <p:nvSpPr>
+          <p:cNvPr id="10" name="TextBox 9"/>
+          <p:cNvSpPr txBox="1"/>
+          <p:nvPr/>
+        </p:nvSpPr>
+        <p:spPr>
+          <a:xfrm>
+            <a:off x="502920" y="1828800"/>
+            <a:ext cx="1371600" cy="914400"/>
+          </a:xfrm>
+          <a:prstGeom prst="rect">
+            <a:avLst/>
+          </a:prstGeom>
+          <a:noFill/>
+        </p:spPr>
+        <p:txBody>
+          <a:bodyPr wrap="square" anchor="ctr">
+            <a:spAutoFit/>
+          </a:bodyPr>
+          <a:lstStyle/>
+          <a:p>
+            <a:pPr algn="ctr"/>
+            <a:r>
+              <a:rPr sz="1700" b="1" i="0">
+                <a:solidFill>
+                  <a:srgbClr val="8C241D"/>
+                </a:solidFill>
+                <a:latin typeface="Hiragino Sans"/>
+              </a:rPr>
+              <a:t>朝</a:t>
+            </a:r>
+          </a:p>
+        </p:txBody>
+      </p:sp>
+      <p:sp>
+        <p:nvSpPr>
+          <p:cNvPr id="11" name="Rectangle 10"/>
+          <p:cNvSpPr/>
+          <p:nvPr/>
+        </p:nvSpPr>
+        <p:spPr>
+          <a:xfrm>
+            <a:off x="2011680" y="1828800"/>
+            <a:ext cx="4709160" cy="914400"/>
+          </a:xfrm>
+          <a:prstGeom prst="rect">
+            <a:avLst/>
+          </a:prstGeom>
+          <a:solidFill>
+            <a:srgbClr val="F1ECE1"/>
+          </a:solidFill>
+          <a:ln w="10160">
+            <a:solidFill>
+              <a:srgbClr val="E1DACB"/>
+            </a:solidFill>
+          </a:ln>
+          <a:effectLst/>
+        </p:spPr>
+        <p:style>
+          <a:lnRef idx="1">
+            <a:schemeClr val="accent1"/>
+          </a:lnRef>
+          <a:fillRef idx="3">
+            <a:schemeClr val="accent1"/>
+          </a:fillRef>
+          <a:effectRef idx="2">
+            <a:schemeClr val="accent1"/>
+          </a:effectRef>
+          <a:fontRef idx="minor">
+            <a:schemeClr val="lt1"/>
+          </a:fontRef>
+        </p:style>
+        <p:txBody>
+          <a:bodyPr rtlCol="0" anchor="ctr"/>
+          <a:lstStyle/>
+          <a:p>
+            <a:pPr algn="ctr"/>
+          </a:p>
+        </p:txBody>
+      </p:sp>
+      <p:sp>
+        <p:nvSpPr>
+          <p:cNvPr id="12" name="TextBox 11"/>
+          <p:cNvSpPr txBox="1"/>
+          <p:nvPr/>
+        </p:nvSpPr>
+        <p:spPr>
+          <a:xfrm>
+            <a:off x="2194560" y="1920240"/>
             <a:ext cx="4389120" cy="274320"/>
           </a:xfrm>
           <a:prstGeom prst="rect">
@@ -11867,13 +13463,13 @@
       </p:sp>
       <p:sp>
         <p:nvSpPr>
-          <p:cNvPr id="22" name="TextBox 21"/>
-          <p:cNvSpPr txBox="1"/>
-          <p:nvPr/>
-        </p:nvSpPr>
-        <p:spPr>
-          <a:xfrm>
-            <a:off x="2194560" y="3218688"/>
+          <p:cNvPr id="13" name="TextBox 12"/>
+          <p:cNvSpPr txBox="1"/>
+          <p:nvPr/>
+        </p:nvSpPr>
+        <p:spPr>
+          <a:xfrm>
+            <a:off x="2194560" y="2194560"/>
             <a:ext cx="4389120" cy="502920"/>
           </a:xfrm>
           <a:prstGeom prst="rect">
@@ -11899,20 +13495,20 @@
                 </a:solidFill>
                 <a:latin typeface="Hiragino Sans"/>
               </a:rPr>
-              <a:t>打席に立つ（会う・聞く・詰める）</a:t>
-            </a:r>
-          </a:p>
-        </p:txBody>
-      </p:sp>
-      <p:sp>
-        <p:nvSpPr>
-          <p:cNvPr id="23" name="Rectangle 22"/>
+              <a:t>調査士(5-7聖域)→当日の打席を1つ決める</a:t>
+            </a:r>
+          </a:p>
+        </p:txBody>
+      </p:sp>
+      <p:sp>
+        <p:nvSpPr>
+          <p:cNvPr id="14" name="Rectangle 13"/>
           <p:cNvSpPr/>
           <p:nvPr/>
         </p:nvSpPr>
         <p:spPr>
           <a:xfrm>
-            <a:off x="6858000" y="2852928"/>
+            <a:off x="6858000" y="1828800"/>
             <a:ext cx="4828032" cy="914400"/>
           </a:xfrm>
           <a:prstGeom prst="rect">
@@ -11952,13 +13548,13 @@
       </p:sp>
       <p:sp>
         <p:nvSpPr>
-          <p:cNvPr id="24" name="TextBox 23"/>
-          <p:cNvSpPr txBox="1"/>
-          <p:nvPr/>
-        </p:nvSpPr>
-        <p:spPr>
-          <a:xfrm>
-            <a:off x="7040880" y="2944368"/>
+          <p:cNvPr id="15" name="TextBox 14"/>
+          <p:cNvSpPr txBox="1"/>
+          <p:nvPr/>
+        </p:nvSpPr>
+        <p:spPr>
+          <a:xfrm>
+            <a:off x="7040880" y="1920240"/>
             <a:ext cx="4480560" cy="274320"/>
           </a:xfrm>
           <a:prstGeom prst="rect">
@@ -11987,13 +13583,13 @@
       </p:sp>
       <p:sp>
         <p:nvSpPr>
-          <p:cNvPr id="25" name="TextBox 24"/>
-          <p:cNvSpPr txBox="1"/>
-          <p:nvPr/>
-        </p:nvSpPr>
-        <p:spPr>
-          <a:xfrm>
-            <a:off x="7040880" y="3218688"/>
+          <p:cNvPr id="16" name="TextBox 15"/>
+          <p:cNvSpPr txBox="1"/>
+          <p:nvPr/>
+        </p:nvSpPr>
+        <p:spPr>
+          <a:xfrm>
+            <a:off x="7040880" y="2194560"/>
             <a:ext cx="4480560" cy="502920"/>
           </a:xfrm>
           <a:prstGeom prst="rect">
@@ -12019,20 +13615,20 @@
                 </a:solidFill>
                 <a:latin typeface="Hiragino Sans"/>
               </a:rPr>
-              <a:t>スマホ→旧Mac：対話を02へ転記／追客ドラフト／資料作成</a:t>
-            </a:r>
-          </a:p>
-        </p:txBody>
-      </p:sp>
-      <p:sp>
-        <p:nvSpPr>
-          <p:cNvPr id="26" name="Rectangle 25"/>
+              <a:t>旧Mac：朝ブリーフ自動（カネ直結2-3件＋今日の打席は誰か）</a:t>
+            </a:r>
+          </a:p>
+        </p:txBody>
+      </p:sp>
+      <p:sp>
+        <p:nvSpPr>
+          <p:cNvPr id="17" name="Rectangle 16"/>
           <p:cNvSpPr/>
           <p:nvPr/>
         </p:nvSpPr>
         <p:spPr>
           <a:xfrm>
-            <a:off x="502920" y="3877056"/>
+            <a:off x="502920" y="2852928"/>
             <a:ext cx="1371600" cy="914400"/>
           </a:xfrm>
           <a:prstGeom prst="rect">
@@ -12070,13 +13666,13 @@
       </p:sp>
       <p:sp>
         <p:nvSpPr>
-          <p:cNvPr id="27" name="Rectangle 26"/>
+          <p:cNvPr id="18" name="Rectangle 17"/>
           <p:cNvSpPr/>
           <p:nvPr/>
         </p:nvSpPr>
         <p:spPr>
           <a:xfrm>
-            <a:off x="502920" y="3877056"/>
+            <a:off x="502920" y="2852928"/>
             <a:ext cx="91440" cy="914400"/>
           </a:xfrm>
           <a:prstGeom prst="rect">
@@ -12114,13 +13710,13 @@
       </p:sp>
       <p:sp>
         <p:nvSpPr>
-          <p:cNvPr id="28" name="TextBox 27"/>
-          <p:cNvSpPr txBox="1"/>
-          <p:nvPr/>
-        </p:nvSpPr>
-        <p:spPr>
-          <a:xfrm>
-            <a:off x="502920" y="3877056"/>
+          <p:cNvPr id="19" name="TextBox 18"/>
+          <p:cNvSpPr txBox="1"/>
+          <p:nvPr/>
+        </p:nvSpPr>
+        <p:spPr>
+          <a:xfrm>
+            <a:off x="502920" y="2852928"/>
             <a:ext cx="1371600" cy="914400"/>
           </a:xfrm>
           <a:prstGeom prst="rect">
@@ -12142,20 +13738,20 @@
                 </a:solidFill>
                 <a:latin typeface="Hiragino Sans"/>
               </a:rPr>
-              <a:t>夜</a:t>
-            </a:r>
-          </a:p>
-        </p:txBody>
-      </p:sp>
-      <p:sp>
-        <p:nvSpPr>
-          <p:cNvPr id="29" name="Rectangle 28"/>
+              <a:t>日中</a:t>
+            </a:r>
+          </a:p>
+        </p:txBody>
+      </p:sp>
+      <p:sp>
+        <p:nvSpPr>
+          <p:cNvPr id="20" name="Rectangle 19"/>
           <p:cNvSpPr/>
           <p:nvPr/>
         </p:nvSpPr>
         <p:spPr>
           <a:xfrm>
-            <a:off x="2011680" y="3877056"/>
+            <a:off x="2011680" y="2852928"/>
             <a:ext cx="4709160" cy="914400"/>
           </a:xfrm>
           <a:prstGeom prst="rect">
@@ -12195,13 +13791,13 @@
       </p:sp>
       <p:sp>
         <p:nvSpPr>
-          <p:cNvPr id="30" name="TextBox 29"/>
-          <p:cNvSpPr txBox="1"/>
-          <p:nvPr/>
-        </p:nvSpPr>
-        <p:spPr>
-          <a:xfrm>
-            <a:off x="2194560" y="3968496"/>
+          <p:cNvPr id="21" name="TextBox 20"/>
+          <p:cNvSpPr txBox="1"/>
+          <p:nvPr/>
+        </p:nvSpPr>
+        <p:spPr>
+          <a:xfrm>
+            <a:off x="2194560" y="2944368"/>
             <a:ext cx="4389120" cy="274320"/>
           </a:xfrm>
           <a:prstGeom prst="rect">
@@ -12230,13 +13826,13 @@
       </p:sp>
       <p:sp>
         <p:nvSpPr>
-          <p:cNvPr id="31" name="TextBox 30"/>
-          <p:cNvSpPr txBox="1"/>
-          <p:nvPr/>
-        </p:nvSpPr>
-        <p:spPr>
-          <a:xfrm>
-            <a:off x="2194560" y="4242816"/>
+          <p:cNvPr id="22" name="TextBox 21"/>
+          <p:cNvSpPr txBox="1"/>
+          <p:nvPr/>
+        </p:nvSpPr>
+        <p:spPr>
+          <a:xfrm>
+            <a:off x="2194560" y="3218688"/>
             <a:ext cx="4389120" cy="502920"/>
           </a:xfrm>
           <a:prstGeom prst="rect">
@@ -12262,20 +13858,20 @@
                 </a:solidFill>
                 <a:latin typeface="Hiragino Sans"/>
               </a:rPr>
-              <a:t>結果と「決め手」を一言／明日の方針</a:t>
-            </a:r>
-          </a:p>
-        </p:txBody>
-      </p:sp>
-      <p:sp>
-        <p:nvSpPr>
-          <p:cNvPr id="32" name="Rectangle 31"/>
+              <a:t>打席に立つ（会う・聞く・詰める）</a:t>
+            </a:r>
+          </a:p>
+        </p:txBody>
+      </p:sp>
+      <p:sp>
+        <p:nvSpPr>
+          <p:cNvPr id="23" name="Rectangle 22"/>
           <p:cNvSpPr/>
           <p:nvPr/>
         </p:nvSpPr>
         <p:spPr>
           <a:xfrm>
-            <a:off x="6858000" y="3877056"/>
+            <a:off x="6858000" y="2852928"/>
             <a:ext cx="4828032" cy="914400"/>
           </a:xfrm>
           <a:prstGeom prst="rect">
@@ -12315,13 +13911,13 @@
       </p:sp>
       <p:sp>
         <p:nvSpPr>
-          <p:cNvPr id="33" name="TextBox 32"/>
-          <p:cNvSpPr txBox="1"/>
-          <p:nvPr/>
-        </p:nvSpPr>
-        <p:spPr>
-          <a:xfrm>
-            <a:off x="7040880" y="3968496"/>
+          <p:cNvPr id="24" name="TextBox 23"/>
+          <p:cNvSpPr txBox="1"/>
+          <p:nvPr/>
+        </p:nvSpPr>
+        <p:spPr>
+          <a:xfrm>
+            <a:off x="7040880" y="2944368"/>
             <a:ext cx="4480560" cy="274320"/>
           </a:xfrm>
           <a:prstGeom prst="rect">
@@ -12350,13 +13946,13 @@
       </p:sp>
       <p:sp>
         <p:nvSpPr>
-          <p:cNvPr id="34" name="TextBox 33"/>
-          <p:cNvSpPr txBox="1"/>
-          <p:nvPr/>
-        </p:nvSpPr>
-        <p:spPr>
-          <a:xfrm>
-            <a:off x="7040880" y="4242816"/>
+          <p:cNvPr id="25" name="TextBox 24"/>
+          <p:cNvSpPr txBox="1"/>
+          <p:nvPr/>
+        </p:nvSpPr>
+        <p:spPr>
+          <a:xfrm>
+            <a:off x="7040880" y="3218688"/>
             <a:ext cx="4480560" cy="502920"/>
           </a:xfrm>
           <a:prstGeom prst="rect">
@@ -12382,20 +13978,20 @@
                 </a:solidFill>
                 <a:latin typeface="Hiragino Sans"/>
               </a:rPr>
-              <a:t>旧Mac：実績化・KPI更新・明日の打席キュー準備</a:t>
-            </a:r>
-          </a:p>
-        </p:txBody>
-      </p:sp>
-      <p:sp>
-        <p:nvSpPr>
-          <p:cNvPr id="35" name="Rectangle 34"/>
+              <a:t>スマホ→旧Mac：対話を02へ転記／追客ドラフト／資料作成</a:t>
+            </a:r>
+          </a:p>
+        </p:txBody>
+      </p:sp>
+      <p:sp>
+        <p:nvSpPr>
+          <p:cNvPr id="26" name="Rectangle 25"/>
           <p:cNvSpPr/>
           <p:nvPr/>
         </p:nvSpPr>
         <p:spPr>
           <a:xfrm>
-            <a:off x="502920" y="4901184"/>
+            <a:off x="502920" y="3877056"/>
             <a:ext cx="1371600" cy="914400"/>
           </a:xfrm>
           <a:prstGeom prst="rect">
@@ -12433,13 +14029,13 @@
       </p:sp>
       <p:sp>
         <p:nvSpPr>
-          <p:cNvPr id="36" name="Rectangle 35"/>
+          <p:cNvPr id="27" name="Rectangle 26"/>
           <p:cNvSpPr/>
           <p:nvPr/>
         </p:nvSpPr>
         <p:spPr>
           <a:xfrm>
-            <a:off x="502920" y="4901184"/>
+            <a:off x="502920" y="3877056"/>
             <a:ext cx="91440" cy="914400"/>
           </a:xfrm>
           <a:prstGeom prst="rect">
@@ -12477,13 +14073,13 @@
       </p:sp>
       <p:sp>
         <p:nvSpPr>
-          <p:cNvPr id="37" name="TextBox 36"/>
-          <p:cNvSpPr txBox="1"/>
-          <p:nvPr/>
-        </p:nvSpPr>
-        <p:spPr>
-          <a:xfrm>
-            <a:off x="502920" y="4901184"/>
+          <p:cNvPr id="28" name="TextBox 27"/>
+          <p:cNvSpPr txBox="1"/>
+          <p:nvPr/>
+        </p:nvSpPr>
+        <p:spPr>
+          <a:xfrm>
+            <a:off x="502920" y="3877056"/>
             <a:ext cx="1371600" cy="914400"/>
           </a:xfrm>
           <a:prstGeom prst="rect">
@@ -12505,20 +14101,20 @@
                 </a:solidFill>
                 <a:latin typeface="Hiragino Sans"/>
               </a:rPr>
-              <a:t>週次(月)</a:t>
-            </a:r>
-          </a:p>
-        </p:txBody>
-      </p:sp>
-      <p:sp>
-        <p:nvSpPr>
-          <p:cNvPr id="38" name="Rectangle 37"/>
+              <a:t>夜</a:t>
+            </a:r>
+          </a:p>
+        </p:txBody>
+      </p:sp>
+      <p:sp>
+        <p:nvSpPr>
+          <p:cNvPr id="29" name="Rectangle 28"/>
           <p:cNvSpPr/>
           <p:nvPr/>
         </p:nvSpPr>
         <p:spPr>
           <a:xfrm>
-            <a:off x="2011680" y="4901184"/>
+            <a:off x="2011680" y="3877056"/>
             <a:ext cx="4709160" cy="914400"/>
           </a:xfrm>
           <a:prstGeom prst="rect">
@@ -12558,13 +14154,13 @@
       </p:sp>
       <p:sp>
         <p:nvSpPr>
-          <p:cNvPr id="39" name="TextBox 38"/>
-          <p:cNvSpPr txBox="1"/>
-          <p:nvPr/>
-        </p:nvSpPr>
-        <p:spPr>
-          <a:xfrm>
-            <a:off x="2194560" y="4992624"/>
+          <p:cNvPr id="30" name="TextBox 29"/>
+          <p:cNvSpPr txBox="1"/>
+          <p:nvPr/>
+        </p:nvSpPr>
+        <p:spPr>
+          <a:xfrm>
+            <a:off x="2194560" y="3968496"/>
             <a:ext cx="4389120" cy="274320"/>
           </a:xfrm>
           <a:prstGeom prst="rect">
@@ -12593,13 +14189,13 @@
       </p:sp>
       <p:sp>
         <p:nvSpPr>
-          <p:cNvPr id="40" name="TextBox 39"/>
-          <p:cNvSpPr txBox="1"/>
-          <p:nvPr/>
-        </p:nvSpPr>
-        <p:spPr>
-          <a:xfrm>
-            <a:off x="2194560" y="5266944"/>
+          <p:cNvPr id="31" name="TextBox 30"/>
+          <p:cNvSpPr txBox="1"/>
+          <p:nvPr/>
+        </p:nvSpPr>
+        <p:spPr>
+          <a:xfrm>
+            <a:off x="2194560" y="4242816"/>
             <a:ext cx="4389120" cy="502920"/>
           </a:xfrm>
           <a:prstGeom prst="rect">
@@ -12625,20 +14221,20 @@
                 </a:solidFill>
                 <a:latin typeface="Hiragino Sans"/>
               </a:rPr>
-              <a:t>先週レビュー→今週の打席を選ぶ</a:t>
-            </a:r>
-          </a:p>
-        </p:txBody>
-      </p:sp>
-      <p:sp>
-        <p:nvSpPr>
-          <p:cNvPr id="41" name="Rectangle 40"/>
+              <a:t>結果と「決め手」を一言／明日の方針</a:t>
+            </a:r>
+          </a:p>
+        </p:txBody>
+      </p:sp>
+      <p:sp>
+        <p:nvSpPr>
+          <p:cNvPr id="32" name="Rectangle 31"/>
           <p:cNvSpPr/>
           <p:nvPr/>
         </p:nvSpPr>
         <p:spPr>
           <a:xfrm>
-            <a:off x="6858000" y="4901184"/>
+            <a:off x="6858000" y="3877056"/>
             <a:ext cx="4828032" cy="914400"/>
           </a:xfrm>
           <a:prstGeom prst="rect">
@@ -12678,6 +14274,369 @@
       </p:sp>
       <p:sp>
         <p:nvSpPr>
+          <p:cNvPr id="33" name="TextBox 32"/>
+          <p:cNvSpPr txBox="1"/>
+          <p:nvPr/>
+        </p:nvSpPr>
+        <p:spPr>
+          <a:xfrm>
+            <a:off x="7040880" y="3968496"/>
+            <a:ext cx="4480560" cy="274320"/>
+          </a:xfrm>
+          <a:prstGeom prst="rect">
+            <a:avLst/>
+          </a:prstGeom>
+          <a:noFill/>
+        </p:spPr>
+        <p:txBody>
+          <a:bodyPr wrap="square" anchor="t">
+            <a:spAutoFit/>
+          </a:bodyPr>
+          <a:lstStyle/>
+          <a:p>
+            <a:pPr algn="l"/>
+            <a:r>
+              <a:rPr sz="950" b="1" i="0">
+                <a:solidFill>
+                  <a:srgbClr val="6E6E6E"/>
+                </a:solidFill>
+                <a:latin typeface="Hiragino Sans"/>
+              </a:rPr>
+              <a:t>旧Mac＝Claude代行</a:t>
+            </a:r>
+          </a:p>
+        </p:txBody>
+      </p:sp>
+      <p:sp>
+        <p:nvSpPr>
+          <p:cNvPr id="34" name="TextBox 33"/>
+          <p:cNvSpPr txBox="1"/>
+          <p:nvPr/>
+        </p:nvSpPr>
+        <p:spPr>
+          <a:xfrm>
+            <a:off x="7040880" y="4242816"/>
+            <a:ext cx="4480560" cy="502920"/>
+          </a:xfrm>
+          <a:prstGeom prst="rect">
+            <a:avLst/>
+          </a:prstGeom>
+          <a:noFill/>
+        </p:spPr>
+        <p:txBody>
+          <a:bodyPr wrap="square" anchor="t">
+            <a:spAutoFit/>
+          </a:bodyPr>
+          <a:lstStyle/>
+          <a:p>
+            <a:pPr algn="l">
+              <a:lnSpc>
+                <a:spcPct val="105000"/>
+              </a:lnSpc>
+            </a:pPr>
+            <a:r>
+              <a:rPr sz="1200" b="0" i="0">
+                <a:solidFill>
+                  <a:srgbClr val="1A1A1A"/>
+                </a:solidFill>
+                <a:latin typeface="Hiragino Sans"/>
+              </a:rPr>
+              <a:t>旧Mac：実績化・KPI更新・明日の打席キュー準備</a:t>
+            </a:r>
+          </a:p>
+        </p:txBody>
+      </p:sp>
+      <p:sp>
+        <p:nvSpPr>
+          <p:cNvPr id="35" name="Rectangle 34"/>
+          <p:cNvSpPr/>
+          <p:nvPr/>
+        </p:nvSpPr>
+        <p:spPr>
+          <a:xfrm>
+            <a:off x="502920" y="4901184"/>
+            <a:ext cx="1371600" cy="914400"/>
+          </a:xfrm>
+          <a:prstGeom prst="rect">
+            <a:avLst/>
+          </a:prstGeom>
+          <a:solidFill>
+            <a:srgbClr val="F4E4E2"/>
+          </a:solidFill>
+          <a:ln>
+            <a:noFill/>
+          </a:ln>
+          <a:effectLst/>
+        </p:spPr>
+        <p:style>
+          <a:lnRef idx="1">
+            <a:schemeClr val="accent1"/>
+          </a:lnRef>
+          <a:fillRef idx="3">
+            <a:schemeClr val="accent1"/>
+          </a:fillRef>
+          <a:effectRef idx="2">
+            <a:schemeClr val="accent1"/>
+          </a:effectRef>
+          <a:fontRef idx="minor">
+            <a:schemeClr val="lt1"/>
+          </a:fontRef>
+        </p:style>
+        <p:txBody>
+          <a:bodyPr rtlCol="0" anchor="ctr"/>
+          <a:lstStyle/>
+          <a:p>
+            <a:pPr algn="ctr"/>
+          </a:p>
+        </p:txBody>
+      </p:sp>
+      <p:sp>
+        <p:nvSpPr>
+          <p:cNvPr id="36" name="Rectangle 35"/>
+          <p:cNvSpPr/>
+          <p:nvPr/>
+        </p:nvSpPr>
+        <p:spPr>
+          <a:xfrm>
+            <a:off x="502920" y="4901184"/>
+            <a:ext cx="91440" cy="914400"/>
+          </a:xfrm>
+          <a:prstGeom prst="rect">
+            <a:avLst/>
+          </a:prstGeom>
+          <a:solidFill>
+            <a:srgbClr val="AA2E26"/>
+          </a:solidFill>
+          <a:ln>
+            <a:noFill/>
+          </a:ln>
+          <a:effectLst/>
+        </p:spPr>
+        <p:style>
+          <a:lnRef idx="1">
+            <a:schemeClr val="accent1"/>
+          </a:lnRef>
+          <a:fillRef idx="3">
+            <a:schemeClr val="accent1"/>
+          </a:fillRef>
+          <a:effectRef idx="2">
+            <a:schemeClr val="accent1"/>
+          </a:effectRef>
+          <a:fontRef idx="minor">
+            <a:schemeClr val="lt1"/>
+          </a:fontRef>
+        </p:style>
+        <p:txBody>
+          <a:bodyPr rtlCol="0" anchor="ctr"/>
+          <a:lstStyle/>
+          <a:p>
+            <a:pPr algn="ctr"/>
+          </a:p>
+        </p:txBody>
+      </p:sp>
+      <p:sp>
+        <p:nvSpPr>
+          <p:cNvPr id="37" name="TextBox 36"/>
+          <p:cNvSpPr txBox="1"/>
+          <p:nvPr/>
+        </p:nvSpPr>
+        <p:spPr>
+          <a:xfrm>
+            <a:off x="502920" y="4901184"/>
+            <a:ext cx="1371600" cy="914400"/>
+          </a:xfrm>
+          <a:prstGeom prst="rect">
+            <a:avLst/>
+          </a:prstGeom>
+          <a:noFill/>
+        </p:spPr>
+        <p:txBody>
+          <a:bodyPr wrap="square" anchor="ctr">
+            <a:spAutoFit/>
+          </a:bodyPr>
+          <a:lstStyle/>
+          <a:p>
+            <a:pPr algn="ctr"/>
+            <a:r>
+              <a:rPr sz="1700" b="1" i="0">
+                <a:solidFill>
+                  <a:srgbClr val="8C241D"/>
+                </a:solidFill>
+                <a:latin typeface="Hiragino Sans"/>
+              </a:rPr>
+              <a:t>週次(月)</a:t>
+            </a:r>
+          </a:p>
+        </p:txBody>
+      </p:sp>
+      <p:sp>
+        <p:nvSpPr>
+          <p:cNvPr id="38" name="Rectangle 37"/>
+          <p:cNvSpPr/>
+          <p:nvPr/>
+        </p:nvSpPr>
+        <p:spPr>
+          <a:xfrm>
+            <a:off x="2011680" y="4901184"/>
+            <a:ext cx="4709160" cy="914400"/>
+          </a:xfrm>
+          <a:prstGeom prst="rect">
+            <a:avLst/>
+          </a:prstGeom>
+          <a:solidFill>
+            <a:srgbClr val="F1ECE1"/>
+          </a:solidFill>
+          <a:ln w="10160">
+            <a:solidFill>
+              <a:srgbClr val="E1DACB"/>
+            </a:solidFill>
+          </a:ln>
+          <a:effectLst/>
+        </p:spPr>
+        <p:style>
+          <a:lnRef idx="1">
+            <a:schemeClr val="accent1"/>
+          </a:lnRef>
+          <a:fillRef idx="3">
+            <a:schemeClr val="accent1"/>
+          </a:fillRef>
+          <a:effectRef idx="2">
+            <a:schemeClr val="accent1"/>
+          </a:effectRef>
+          <a:fontRef idx="minor">
+            <a:schemeClr val="lt1"/>
+          </a:fontRef>
+        </p:style>
+        <p:txBody>
+          <a:bodyPr rtlCol="0" anchor="ctr"/>
+          <a:lstStyle/>
+          <a:p>
+            <a:pPr algn="ctr"/>
+          </a:p>
+        </p:txBody>
+      </p:sp>
+      <p:sp>
+        <p:nvSpPr>
+          <p:cNvPr id="39" name="TextBox 38"/>
+          <p:cNvSpPr txBox="1"/>
+          <p:nvPr/>
+        </p:nvSpPr>
+        <p:spPr>
+          <a:xfrm>
+            <a:off x="2194560" y="4992624"/>
+            <a:ext cx="4389120" cy="274320"/>
+          </a:xfrm>
+          <a:prstGeom prst="rect">
+            <a:avLst/>
+          </a:prstGeom>
+          <a:noFill/>
+        </p:spPr>
+        <p:txBody>
+          <a:bodyPr wrap="square" anchor="t">
+            <a:spAutoFit/>
+          </a:bodyPr>
+          <a:lstStyle/>
+          <a:p>
+            <a:pPr algn="l"/>
+            <a:r>
+              <a:rPr sz="950" b="1" i="0">
+                <a:solidFill>
+                  <a:srgbClr val="AA2E26"/>
+                </a:solidFill>
+                <a:latin typeface="Hiragino Sans"/>
+              </a:rPr>
+              <a:t>人＝打席</a:t>
+            </a:r>
+          </a:p>
+        </p:txBody>
+      </p:sp>
+      <p:sp>
+        <p:nvSpPr>
+          <p:cNvPr id="40" name="TextBox 39"/>
+          <p:cNvSpPr txBox="1"/>
+          <p:nvPr/>
+        </p:nvSpPr>
+        <p:spPr>
+          <a:xfrm>
+            <a:off x="2194560" y="5266944"/>
+            <a:ext cx="4389120" cy="502920"/>
+          </a:xfrm>
+          <a:prstGeom prst="rect">
+            <a:avLst/>
+          </a:prstGeom>
+          <a:noFill/>
+        </p:spPr>
+        <p:txBody>
+          <a:bodyPr wrap="square" anchor="t">
+            <a:spAutoFit/>
+          </a:bodyPr>
+          <a:lstStyle/>
+          <a:p>
+            <a:pPr algn="l">
+              <a:lnSpc>
+                <a:spcPct val="105000"/>
+              </a:lnSpc>
+            </a:pPr>
+            <a:r>
+              <a:rPr sz="1200" b="0" i="0">
+                <a:solidFill>
+                  <a:srgbClr val="1A1A1A"/>
+                </a:solidFill>
+                <a:latin typeface="Hiragino Sans"/>
+              </a:rPr>
+              <a:t>先週レビュー→今週の打席を選ぶ</a:t>
+            </a:r>
+          </a:p>
+        </p:txBody>
+      </p:sp>
+      <p:sp>
+        <p:nvSpPr>
+          <p:cNvPr id="41" name="Rectangle 40"/>
+          <p:cNvSpPr/>
+          <p:nvPr/>
+        </p:nvSpPr>
+        <p:spPr>
+          <a:xfrm>
+            <a:off x="6858000" y="4901184"/>
+            <a:ext cx="4828032" cy="914400"/>
+          </a:xfrm>
+          <a:prstGeom prst="rect">
+            <a:avLst/>
+          </a:prstGeom>
+          <a:solidFill>
+            <a:srgbClr val="ECE8DF"/>
+          </a:solidFill>
+          <a:ln w="10160">
+            <a:solidFill>
+              <a:srgbClr val="E1DACB"/>
+            </a:solidFill>
+          </a:ln>
+          <a:effectLst/>
+        </p:spPr>
+        <p:style>
+          <a:lnRef idx="1">
+            <a:schemeClr val="accent1"/>
+          </a:lnRef>
+          <a:fillRef idx="3">
+            <a:schemeClr val="accent1"/>
+          </a:fillRef>
+          <a:effectRef idx="2">
+            <a:schemeClr val="accent1"/>
+          </a:effectRef>
+          <a:fontRef idx="minor">
+            <a:schemeClr val="lt1"/>
+          </a:fontRef>
+        </p:style>
+        <p:txBody>
+          <a:bodyPr rtlCol="0" anchor="ctr"/>
+          <a:lstStyle/>
+          <a:p>
+            <a:pPr algn="ctr"/>
+          </a:p>
+        </p:txBody>
+      </p:sp>
+      <p:sp>
+        <p:nvSpPr>
           <p:cNvPr id="42" name="TextBox 41"/>
           <p:cNvSpPr txBox="1"/>
           <p:nvPr/>
@@ -12758,7 +14717,7 @@
 </p:sld>
 </file>
 
-<file path=ppt/slides/slide8.xml><?xml version="1.0" encoding="utf-8"?>
+<file path=ppt/slides/slide9.xml><?xml version="1.0" encoding="utf-8"?>
 <p:sld xmlns:a="http://schemas.openxmlformats.org/drawingml/2006/main" xmlns:p="http://schemas.openxmlformats.org/presentationml/2006/main" xmlns:r="http://schemas.openxmlformats.org/officeDocument/2006/relationships">
   <p:cSld>
     <p:bg>
